--- a/calvary_analysis/decks/leadership_deck.pptx
+++ b/calvary_analysis/decks/leadership_deck.pptx
@@ -132,13 +132,13 @@
   <p:extLst>
     <p:ext uri="{521415D9-36F7-43E2-AB2F-B90AF26B5E84}">
       <p14:sectionLst xmlns:p14="http://schemas.microsoft.com/office/powerpoint/2010/main">
-        <p14:section name="Opening" id="{d9ed9791-4a11-d8e6-f48a-769ec25c885e}">
+        <p14:section name="Opening" id="{2f3584d8-3225-fb01-53f9-522a71b7ac21}">
           <p14:sldIdLst>
             <p14:sldId id="256"/>
             <p14:sldId id="257"/>
           </p14:sldIdLst>
         </p14:section>
-        <p14:section name="Where Calvary stands" id="{d867ffe1-c21e-6877-e83b-3243bd39ba4a}">
+        <p14:section name="Where Calvary stands" id="{ee07b317-f826-1380-2403-f1dd0905861f}">
           <p14:sldIdLst>
             <p14:sldId id="258"/>
             <p14:sldId id="259"/>
@@ -147,7 +147,7 @@
             <p14:sldId id="262"/>
           </p14:sldIdLst>
         </p14:section>
-        <p14:section name="The clouds on the horizon" id="{0b0fcb78-099c-71c6-b119-a5201831a55f}">
+        <p14:section name="The clouds on the horizon" id="{7e96f638-cd2a-2bea-def7-6afe02d8f091}">
           <p14:sldIdLst>
             <p14:sldId id="263"/>
             <p14:sldId id="264"/>
@@ -155,21 +155,21 @@
             <p14:sldId id="266"/>
           </p14:sldIdLst>
         </p14:section>
-        <p14:section name="What peers show" id="{a2838a66-8be0-44a2-19a6-96f746ab016d}">
+        <p14:section name="What peers show" id="{bf725845-d87d-b217-2419-026ce2b3f9f4}">
           <p14:sldIdLst>
             <p14:sldId id="267"/>
             <p14:sldId id="268"/>
             <p14:sldId id="269"/>
           </p14:sldIdLst>
         </p14:section>
-        <p14:section name="Where the opportunities are" id="{8be3d250-31c6-5f31-f3ab-20a3f4bade2e}">
+        <p14:section name="Where the opportunities are" id="{6897f368-4761-3772-decb-50dba72cc395}">
           <p14:sldIdLst>
             <p14:sldId id="270"/>
             <p14:sldId id="271"/>
             <p14:sldId id="272"/>
           </p14:sldIdLst>
         </p14:section>
-        <p14:section name="A plan to consider" id="{984a458b-8420-5eb4-e2df-d672dc247302}">
+        <p14:section name="A plan to consider" id="{615333b6-9f7f-70bd-5fa7-197e00313681}">
           <p14:sldIdLst>
             <p14:sldId id="273"/>
             <p14:sldId id="274"/>
@@ -179,7 +179,7 @@
             <p14:sldId id="278"/>
           </p14:sldIdLst>
         </p14:section>
-        <p14:section name="Closing" id="{103e4119-beea-0e25-2e33-4d7abd76bd2f}">
+        <p14:section name="Closing" id="{a7ea7096-e4d2-c29d-1a36-89d9279dae06}">
           <p14:sldIdLst>
             <p14:sldId id="279"/>
             <p14:sldId id="280"/>
@@ -11487,7 +11487,7 @@
         <p:spPr>
           <a:xfrm>
             <a:off x="548640" y="1600200"/>
-            <a:ext cx="5170932" cy="3977640"/>
+            <a:ext cx="11091672" cy="3017520"/>
           </a:xfrm>
           <a:prstGeom prst="rect">
             <a:avLst/>
@@ -11502,8 +11502,8 @@
         </p:nvSpPr>
         <p:spPr>
           <a:xfrm>
-            <a:off x="8503920" y="1600200"/>
-            <a:ext cx="3139135" cy="3977640"/>
+            <a:off x="548640" y="4709160"/>
+            <a:ext cx="11094415" cy="868680"/>
           </a:xfrm>
           <a:prstGeom prst="rect">
             <a:avLst/>
@@ -11527,8 +11527,8 @@
         </p:nvSpPr>
         <p:spPr>
           <a:xfrm>
-            <a:off x="8686800" y="1737360"/>
-            <a:ext cx="2773375" cy="457200"/>
+            <a:off x="731520" y="4818888"/>
+            <a:ext cx="1371600" cy="649224"/>
           </a:xfrm>
           <a:prstGeom prst="rect">
             <a:avLst/>
@@ -11544,14 +11544,14 @@
               <a:buNone/>
             </a:pPr>
             <a:r>
-              <a:rPr lang="en-US" sz="1400" b="1" dirty="0">
+              <a:rPr lang="en-US" sz="1200" b="1" dirty="0">
                 <a:solidFill>
                   <a:srgbClr val="41242F"/>
                 </a:solidFill>
               </a:rPr>
               <a:t>Closest neighbors</a:t>
             </a:r>
-            <a:endParaRPr lang="en-US" sz="1400" dirty="0"/>
+            <a:endParaRPr lang="en-US" sz="1200" dirty="0"/>
           </a:p>
         </p:txBody>
       </p:sp>
@@ -11563,8 +11563,8 @@
         </p:nvSpPr>
         <p:spPr>
           <a:xfrm>
-            <a:off x="8686800" y="2240280"/>
-            <a:ext cx="2773375" cy="3200400"/>
+            <a:off x="2194560" y="4818888"/>
+            <a:ext cx="4495648" cy="649224"/>
           </a:xfrm>
           <a:prstGeom prst="rect">
             <a:avLst/>
@@ -11578,78 +11578,100 @@
           <a:p>
             <a:pPr indent="0" marL="0">
               <a:spcAft>
-                <a:spcPts val="300"/>
+                <a:spcPts val="200"/>
               </a:spcAft>
               <a:buNone/>
             </a:pPr>
             <a:r>
-              <a:rPr lang="en-US" sz="1100" b="1" dirty="0">
+              <a:rPr lang="en-US" sz="1050" b="1" dirty="0">
                 <a:solidFill>
                   <a:srgbClr val="41242F"/>
                 </a:solidFill>
               </a:rPr>
               <a:t>17 shared funders with Miriam's Kitchen; 14 each with DASH and House of Ruth DC.</a:t>
             </a:r>
-            <a:endParaRPr lang="en-US" sz="1100" dirty="0"/>
-          </a:p>
-          <a:p>
-            <a:pPr marL="228600" indent="-228600">
+            <a:endParaRPr lang="en-US" sz="1050" dirty="0"/>
+          </a:p>
+          <a:p>
+            <a:pPr marL="177800" indent="-177800">
               <a:spcAft>
-                <a:spcPts val="400"/>
+                <a:spcPts val="200"/>
               </a:spcAft>
               <a:buSzPct val="100000"/>
               <a:buChar char="•"/>
             </a:pPr>
             <a:r>
-              <a:rPr lang="en-US" sz="1100" dirty="0">
+              <a:rPr lang="en-US" sz="1050" dirty="0">
                 <a:solidFill>
                   <a:srgbClr val="1F1B1D"/>
                 </a:solidFill>
               </a:rPr>
               <a:t>House of Ruth DC (69) and House of Ruth MD (81) have the longest lists of funders Calvary lacks.</a:t>
             </a:r>
-            <a:endParaRPr lang="en-US" sz="1100" dirty="0"/>
-          </a:p>
+            <a:endParaRPr lang="en-US" sz="1050" dirty="0"/>
+          </a:p>
+        </p:txBody>
+      </p:sp>
+      <p:sp>
+        <p:nvSpPr>
+          <p:cNvPr id="7" name="Text 4"/>
+          <p:cNvSpPr txBox="1"/>
+          <p:nvPr/>
+        </p:nvSpPr>
+        <p:spPr>
+          <a:xfrm>
+            <a:off x="6964528" y="4818888"/>
+            <a:ext cx="4495648" cy="649224"/>
+          </a:xfrm>
+          <a:prstGeom prst="rect">
+            <a:avLst/>
+          </a:prstGeom>
+          <a:noFill/>
+          <a:ln/>
+        </p:spPr>
+        <p:txBody>
+          <a:bodyPr wrap="square" lIns="0" tIns="0" rIns="0" bIns="0" rtlCol="0" anchor="t"/>
+          <a:lstStyle/>
           <a:p>
             <a:pPr indent="0" marL="0">
               <a:spcAft>
-                <a:spcPts val="300"/>
+                <a:spcPts val="200"/>
               </a:spcAft>
               <a:buNone/>
             </a:pPr>
             <a:r>
-              <a:rPr lang="en-US" sz="1100" b="1" dirty="0">
+              <a:rPr lang="en-US" sz="1050" b="1" dirty="0">
                 <a:solidFill>
                   <a:srgbClr val="41242F"/>
                 </a:solidFill>
               </a:rPr>
               <a:t>Board overlaps are thin in public filings.</a:t>
             </a:r>
-            <a:endParaRPr lang="en-US" sz="1100" dirty="0"/>
-          </a:p>
-          <a:p>
-            <a:pPr marL="228600" indent="-228600">
+            <a:endParaRPr lang="en-US" sz="1050" dirty="0"/>
+          </a:p>
+          <a:p>
+            <a:pPr marL="177800" indent="-177800">
               <a:spcAft>
-                <a:spcPts val="400"/>
+                <a:spcPts val="200"/>
               </a:spcAft>
               <a:buSzPct val="100000"/>
               <a:buChar char="•"/>
             </a:pPr>
             <a:r>
-              <a:rPr lang="en-US" sz="1100" dirty="0">
+              <a:rPr lang="en-US" sz="1050" dirty="0">
                 <a:solidFill>
                   <a:srgbClr val="1F1B1D"/>
                 </a:solidFill>
               </a:rPr>
               <a:t>One high-confidence link, not a funder; introductions run through shared funders and peers.</a:t>
             </a:r>
-            <a:endParaRPr lang="en-US" sz="1100" dirty="0"/>
+            <a:endParaRPr lang="en-US" sz="1050" dirty="0"/>
           </a:p>
         </p:txBody>
       </p:sp>
       <p:sp>
         <p:nvSpPr>
-          <p:cNvPr id="7" name="bumper"/>
+          <p:cNvPr id="8" name="bumper"/>
           <p:cNvSpPr txBox="1"/>
           <p:nvPr/>
         </p:nvSpPr>
@@ -11696,7 +11718,7 @@
       </p:sp>
       <p:sp>
         <p:nvSpPr>
-          <p:cNvPr id="8" name="footnote"/>
+          <p:cNvPr id="9" name="footnote"/>
           <p:cNvSpPr txBox="1"/>
           <p:nvPr/>
         </p:nvSpPr>

--- a/calvary_analysis/decks/leadership_deck.pptx
+++ b/calvary_analysis/decks/leadership_deck.pptx
@@ -132,13 +132,13 @@
   <p:extLst>
     <p:ext uri="{521415D9-36F7-43E2-AB2F-B90AF26B5E84}">
       <p14:sectionLst xmlns:p14="http://schemas.microsoft.com/office/powerpoint/2010/main">
-        <p14:section name="Opening" id="{2f3584d8-3225-fb01-53f9-522a71b7ac21}">
+        <p14:section name="Opening" id="{074112d1-aca3-5fd5-c21e-b993ab713bcf}">
           <p14:sldIdLst>
             <p14:sldId id="256"/>
             <p14:sldId id="257"/>
           </p14:sldIdLst>
         </p14:section>
-        <p14:section name="Where Calvary stands" id="{ee07b317-f826-1380-2403-f1dd0905861f}">
+        <p14:section name="Where Calvary stands" id="{3a9c4021-a73e-1b72-b3ee-e3f06c96b284}">
           <p14:sldIdLst>
             <p14:sldId id="258"/>
             <p14:sldId id="259"/>
@@ -147,7 +147,7 @@
             <p14:sldId id="262"/>
           </p14:sldIdLst>
         </p14:section>
-        <p14:section name="The clouds on the horizon" id="{7e96f638-cd2a-2bea-def7-6afe02d8f091}">
+        <p14:section name="The clouds on the horizon" id="{09f2bee3-60bd-f586-ad59-9db2c48f5bce}">
           <p14:sldIdLst>
             <p14:sldId id="263"/>
             <p14:sldId id="264"/>
@@ -155,21 +155,21 @@
             <p14:sldId id="266"/>
           </p14:sldIdLst>
         </p14:section>
-        <p14:section name="What peers show" id="{bf725845-d87d-b217-2419-026ce2b3f9f4}">
+        <p14:section name="What peers show" id="{0f7fe5ae-b84d-829f-4715-51b8b01bef5e}">
           <p14:sldIdLst>
             <p14:sldId id="267"/>
             <p14:sldId id="268"/>
             <p14:sldId id="269"/>
           </p14:sldIdLst>
         </p14:section>
-        <p14:section name="Where the opportunities are" id="{6897f368-4761-3772-decb-50dba72cc395}">
+        <p14:section name="Where the opportunities are" id="{fb277776-9ffe-81c8-d297-ada61bcea97b}">
           <p14:sldIdLst>
             <p14:sldId id="270"/>
             <p14:sldId id="271"/>
             <p14:sldId id="272"/>
           </p14:sldIdLst>
         </p14:section>
-        <p14:section name="A plan to consider" id="{615333b6-9f7f-70bd-5fa7-197e00313681}">
+        <p14:section name="A plan to consider" id="{debf9b30-f549-2cd1-b0f0-c112c498fd4e}">
           <p14:sldIdLst>
             <p14:sldId id="273"/>
             <p14:sldId id="274"/>
@@ -179,7 +179,7 @@
             <p14:sldId id="278"/>
           </p14:sldIdLst>
         </p14:section>
-        <p14:section name="Closing" id="{a7ea7096-e4d2-c29d-1a36-89d9279dae06}">
+        <p14:section name="Closing" id="{e1627e31-f013-1700-c443-e62003f208ad}">
           <p14:sldIdLst>
             <p14:sldId id="279"/>
             <p14:sldId id="280"/>
@@ -225,6 +225,13 @@
             <a:solidFill>
               <a:srgbClr val="A03F7E"/>
             </a:solidFill>
+            <a:ln w="6350" cap="flat">
+              <a:solidFill>
+                <a:srgbClr val="1F1B1D"/>
+              </a:solidFill>
+              <a:prstDash val="solid"/>
+              <a:round/>
+            </a:ln>
             <a:effectLst/>
           </c:spPr>
           <c:invertIfNegative val="0"/>
@@ -235,9 +242,9 @@
               <a:lstStyle/>
               <a:p>
                 <a:pPr>
-                  <a:defRPr b="0" i="0" strike="noStrike" sz="800" u="none">
+                  <a:defRPr b="1" i="0" strike="noStrike" sz="800" u="none">
                     <a:solidFill>
-                      <a:srgbClr val="5C5458"/>
+                      <a:srgbClr val="1F1B1D"/>
                     </a:solidFill>
                     <a:latin typeface="+mn-lt"/>
                   </a:defRPr>
@@ -357,6 +364,13 @@
             <a:solidFill>
               <a:srgbClr val="B8810C"/>
             </a:solidFill>
+            <a:ln w="6350" cap="flat">
+              <a:solidFill>
+                <a:srgbClr val="1F1B1D"/>
+              </a:solidFill>
+              <a:prstDash val="solid"/>
+              <a:round/>
+            </a:ln>
             <a:effectLst/>
           </c:spPr>
           <c:invertIfNegative val="0"/>
@@ -367,9 +381,9 @@
               <a:lstStyle/>
               <a:p>
                 <a:pPr>
-                  <a:defRPr b="0" i="0" strike="noStrike" sz="800" u="none">
+                  <a:defRPr b="1" i="0" strike="noStrike" sz="800" u="none">
                     <a:solidFill>
-                      <a:srgbClr val="5C5458"/>
+                      <a:srgbClr val="1F1B1D"/>
                     </a:solidFill>
                     <a:latin typeface="+mn-lt"/>
                   </a:defRPr>
@@ -489,6 +503,13 @@
             <a:solidFill>
               <a:srgbClr val="CF5A2C"/>
             </a:solidFill>
+            <a:ln w="6350" cap="flat">
+              <a:solidFill>
+                <a:srgbClr val="1F1B1D"/>
+              </a:solidFill>
+              <a:prstDash val="solid"/>
+              <a:round/>
+            </a:ln>
             <a:effectLst/>
           </c:spPr>
           <c:invertIfNegative val="0"/>
@@ -499,9 +520,9 @@
               <a:lstStyle/>
               <a:p>
                 <a:pPr>
-                  <a:defRPr b="0" i="0" strike="noStrike" sz="800" u="none">
+                  <a:defRPr b="1" i="0" strike="noStrike" sz="800" u="none">
                     <a:solidFill>
-                      <a:srgbClr val="5C5458"/>
+                      <a:srgbClr val="1F1B1D"/>
                     </a:solidFill>
                     <a:latin typeface="+mn-lt"/>
                   </a:defRPr>
@@ -621,6 +642,13 @@
             <a:solidFill>
               <a:srgbClr val="3B6FD8"/>
             </a:solidFill>
+            <a:ln w="6350" cap="flat">
+              <a:solidFill>
+                <a:srgbClr val="1F1B1D"/>
+              </a:solidFill>
+              <a:prstDash val="solid"/>
+              <a:round/>
+            </a:ln>
             <a:effectLst/>
           </c:spPr>
           <c:invertIfNegative val="0"/>
@@ -631,9 +659,9 @@
               <a:lstStyle/>
               <a:p>
                 <a:pPr>
-                  <a:defRPr b="0" i="0" strike="noStrike" sz="800" u="none">
+                  <a:defRPr b="1" i="0" strike="noStrike" sz="800" u="none">
                     <a:solidFill>
-                      <a:srgbClr val="5C5458"/>
+                      <a:srgbClr val="1F1B1D"/>
                     </a:solidFill>
                     <a:latin typeface="+mn-lt"/>
                   </a:defRPr>
@@ -742,9 +770,9 @@
             <a:lstStyle/>
             <a:p>
               <a:pPr>
-                <a:defRPr b="0" i="0" strike="noStrike" sz="800" u="none">
+                <a:defRPr b="1" i="0" strike="noStrike" sz="800" u="none">
                   <a:solidFill>
-                    <a:srgbClr val="5C5458"/>
+                    <a:srgbClr val="1F1B1D"/>
                   </a:solidFill>
                   <a:latin typeface="+mn-lt"/>
                 </a:defRPr>
@@ -780,7 +808,7 @@
         <c:spPr>
           <a:ln w="12700" cap="flat">
             <a:solidFill>
-              <a:srgbClr val="888888"/>
+              <a:srgbClr val="1F1B1D"/>
             </a:solidFill>
             <a:prstDash val="solid"/>
             <a:round/>
@@ -791,9 +819,9 @@
           <a:lstStyle/>
           <a:p>
             <a:pPr>
-              <a:defRPr sz="900" b="0" i="0" u="none" strike="noStrike">
-                <a:solidFill>
-                  <a:srgbClr val="5C5458"/>
+              <a:defRPr sz="900" b="1" i="0" u="none" strike="noStrike">
+                <a:solidFill>
+                  <a:srgbClr val="1F1B1D"/>
                 </a:solidFill>
                 <a:latin typeface="+mn-lt"/>
               </a:defRPr>
@@ -815,24 +843,15 @@
         </c:scaling>
         <c:delete val="0"/>
         <c:axPos val="l"/>
-        <c:majorGridlines>
-          <c:spPr>
-            <a:ln w="6350" cap="flat">
-              <a:solidFill>
-                <a:srgbClr val="E6E2E4"/>
-              </a:solidFill>
-              <a:prstDash val="solid"/>
-              <a:round/>
-            </a:ln>
-          </c:spPr>
-        </c:majorGridlines>
         <c:numFmt formatCode="$#,##0.0,,&quot;M&quot;" sourceLinked="0"/>
         <c:majorTickMark val="out"/>
         <c:minorTickMark val="none"/>
         <c:tickLblPos val="nextTo"/>
         <c:spPr>
           <a:ln w="12700" cap="flat">
-            <a:noFill/>
+            <a:solidFill>
+              <a:srgbClr val="1F1B1D"/>
+            </a:solidFill>
             <a:prstDash val="solid"/>
             <a:round/>
           </a:ln>
@@ -842,9 +861,9 @@
           <a:lstStyle/>
           <a:p>
             <a:pPr>
-              <a:defRPr sz="900" b="0" i="0" u="none" strike="noStrike">
-                <a:solidFill>
-                  <a:srgbClr val="5C5458"/>
+              <a:defRPr sz="900" b="1" i="0" u="none" strike="noStrike">
+                <a:solidFill>
+                  <a:srgbClr val="1F1B1D"/>
                 </a:solidFill>
                 <a:latin typeface="+mn-lt"/>
               </a:defRPr>
@@ -934,6 +953,13 @@
             <a:solidFill>
               <a:srgbClr val="A03F7E"/>
             </a:solidFill>
+            <a:ln w="6350" cap="flat">
+              <a:solidFill>
+                <a:srgbClr val="1F1B1D"/>
+              </a:solidFill>
+              <a:prstDash val="solid"/>
+              <a:round/>
+            </a:ln>
             <a:effectLst/>
           </c:spPr>
           <c:invertIfNegative val="0"/>
@@ -944,9 +970,9 @@
               <a:lstStyle/>
               <a:p>
                 <a:pPr>
-                  <a:defRPr b="0" i="0" strike="noStrike" sz="800" u="none">
+                  <a:defRPr b="1" i="0" strike="noStrike" sz="800" u="none">
                     <a:solidFill>
-                      <a:srgbClr val="5C5458"/>
+                      <a:srgbClr val="1F1B1D"/>
                     </a:solidFill>
                     <a:latin typeface="+mn-lt"/>
                   </a:defRPr>
@@ -1048,6 +1074,13 @@
             <a:solidFill>
               <a:srgbClr val="0F9ACB"/>
             </a:solidFill>
+            <a:ln w="6350" cap="flat">
+              <a:solidFill>
+                <a:srgbClr val="1F1B1D"/>
+              </a:solidFill>
+              <a:prstDash val="solid"/>
+              <a:round/>
+            </a:ln>
             <a:effectLst/>
           </c:spPr>
           <c:invertIfNegative val="0"/>
@@ -1058,9 +1091,9 @@
               <a:lstStyle/>
               <a:p>
                 <a:pPr>
-                  <a:defRPr b="0" i="0" strike="noStrike" sz="800" u="none">
+                  <a:defRPr b="1" i="0" strike="noStrike" sz="800" u="none">
                     <a:solidFill>
-                      <a:srgbClr val="5C5458"/>
+                      <a:srgbClr val="1F1B1D"/>
                     </a:solidFill>
                     <a:latin typeface="+mn-lt"/>
                   </a:defRPr>
@@ -1162,6 +1195,13 @@
             <a:solidFill>
               <a:srgbClr val="B8810C"/>
             </a:solidFill>
+            <a:ln w="6350" cap="flat">
+              <a:solidFill>
+                <a:srgbClr val="1F1B1D"/>
+              </a:solidFill>
+              <a:prstDash val="solid"/>
+              <a:round/>
+            </a:ln>
             <a:effectLst/>
           </c:spPr>
           <c:invertIfNegative val="0"/>
@@ -1172,9 +1212,9 @@
               <a:lstStyle/>
               <a:p>
                 <a:pPr>
-                  <a:defRPr b="0" i="0" strike="noStrike" sz="800" u="none">
+                  <a:defRPr b="1" i="0" strike="noStrike" sz="800" u="none">
                     <a:solidFill>
-                      <a:srgbClr val="5C5458"/>
+                      <a:srgbClr val="1F1B1D"/>
                     </a:solidFill>
                     <a:latin typeface="+mn-lt"/>
                   </a:defRPr>
@@ -1276,6 +1316,13 @@
             <a:solidFill>
               <a:srgbClr val="3B6FD8"/>
             </a:solidFill>
+            <a:ln w="6350" cap="flat">
+              <a:solidFill>
+                <a:srgbClr val="1F1B1D"/>
+              </a:solidFill>
+              <a:prstDash val="solid"/>
+              <a:round/>
+            </a:ln>
             <a:effectLst/>
           </c:spPr>
           <c:invertIfNegative val="0"/>
@@ -1286,9 +1333,9 @@
               <a:lstStyle/>
               <a:p>
                 <a:pPr>
-                  <a:defRPr b="0" i="0" strike="noStrike" sz="800" u="none">
+                  <a:defRPr b="1" i="0" strike="noStrike" sz="800" u="none">
                     <a:solidFill>
-                      <a:srgbClr val="5C5458"/>
+                      <a:srgbClr val="1F1B1D"/>
                     </a:solidFill>
                     <a:latin typeface="+mn-lt"/>
                   </a:defRPr>
@@ -1379,9 +1426,9 @@
             <a:lstStyle/>
             <a:p>
               <a:pPr>
-                <a:defRPr b="0" i="0" strike="noStrike" sz="800" u="none">
+                <a:defRPr b="1" i="0" strike="noStrike" sz="800" u="none">
                   <a:solidFill>
-                    <a:srgbClr val="5C5458"/>
+                    <a:srgbClr val="1F1B1D"/>
                   </a:solidFill>
                   <a:latin typeface="+mn-lt"/>
                 </a:defRPr>
@@ -1417,7 +1464,7 @@
         <c:spPr>
           <a:ln w="12700" cap="flat">
             <a:solidFill>
-              <a:srgbClr val="888888"/>
+              <a:srgbClr val="1F1B1D"/>
             </a:solidFill>
             <a:prstDash val="solid"/>
             <a:round/>
@@ -1428,9 +1475,9 @@
           <a:lstStyle/>
           <a:p>
             <a:pPr>
-              <a:defRPr sz="900" b="0" i="0" u="none" strike="noStrike">
-                <a:solidFill>
-                  <a:srgbClr val="5C5458"/>
+              <a:defRPr sz="900" b="1" i="0" u="none" strike="noStrike">
+                <a:solidFill>
+                  <a:srgbClr val="1F1B1D"/>
                 </a:solidFill>
                 <a:latin typeface="+mn-lt"/>
               </a:defRPr>
@@ -1452,24 +1499,15 @@
         </c:scaling>
         <c:delete val="0"/>
         <c:axPos val="l"/>
-        <c:majorGridlines>
-          <c:spPr>
-            <a:ln w="6350" cap="flat">
-              <a:solidFill>
-                <a:srgbClr val="E6E2E4"/>
-              </a:solidFill>
-              <a:prstDash val="solid"/>
-              <a:round/>
-            </a:ln>
-          </c:spPr>
-        </c:majorGridlines>
         <c:numFmt formatCode="$#,##0.0,,&quot;M&quot;" sourceLinked="0"/>
         <c:majorTickMark val="out"/>
         <c:minorTickMark val="none"/>
         <c:tickLblPos val="nextTo"/>
         <c:spPr>
           <a:ln w="12700" cap="flat">
-            <a:noFill/>
+            <a:solidFill>
+              <a:srgbClr val="1F1B1D"/>
+            </a:solidFill>
             <a:prstDash val="solid"/>
             <a:round/>
           </a:ln>
@@ -1479,9 +1517,9 @@
           <a:lstStyle/>
           <a:p>
             <a:pPr>
-              <a:defRPr sz="900" b="0" i="0" u="none" strike="noStrike">
-                <a:solidFill>
-                  <a:srgbClr val="5C5458"/>
+              <a:defRPr sz="900" b="1" i="0" u="none" strike="noStrike">
+                <a:solidFill>
+                  <a:srgbClr val="1F1B1D"/>
                 </a:solidFill>
                 <a:latin typeface="+mn-lt"/>
               </a:defRPr>
@@ -1571,6 +1609,13 @@
             <a:solidFill>
               <a:srgbClr val="B8810C"/>
             </a:solidFill>
+            <a:ln w="6350" cap="flat">
+              <a:solidFill>
+                <a:srgbClr val="1F1B1D"/>
+              </a:solidFill>
+              <a:prstDash val="solid"/>
+              <a:round/>
+            </a:ln>
             <a:effectLst/>
           </c:spPr>
           <c:invertIfNegative val="0"/>
@@ -1581,9 +1626,9 @@
               <a:lstStyle/>
               <a:p>
                 <a:pPr>
-                  <a:defRPr b="0" i="0" strike="noStrike" sz="800" u="none">
+                  <a:defRPr b="1" i="0" strike="noStrike" sz="800" u="none">
                     <a:solidFill>
-                      <a:srgbClr val="5C5458"/>
+                      <a:srgbClr val="1F1B1D"/>
                     </a:solidFill>
                     <a:latin typeface="+mn-lt"/>
                   </a:defRPr>
@@ -1685,9 +1730,9 @@
             <a:lstStyle/>
             <a:p>
               <a:pPr>
-                <a:defRPr b="0" i="0" strike="noStrike" sz="800" u="none">
+                <a:defRPr b="1" i="0" strike="noStrike" sz="800" u="none">
                   <a:solidFill>
-                    <a:srgbClr val="5C5458"/>
+                    <a:srgbClr val="1F1B1D"/>
                   </a:solidFill>
                   <a:latin typeface="+mn-lt"/>
                 </a:defRPr>
@@ -1722,7 +1767,7 @@
         <c:spPr>
           <a:ln w="12700" cap="flat">
             <a:solidFill>
-              <a:srgbClr val="888888"/>
+              <a:srgbClr val="1F1B1D"/>
             </a:solidFill>
             <a:prstDash val="solid"/>
             <a:round/>
@@ -1733,9 +1778,9 @@
           <a:lstStyle/>
           <a:p>
             <a:pPr>
-              <a:defRPr sz="800" b="0" i="0" u="none" strike="noStrike">
-                <a:solidFill>
-                  <a:srgbClr val="5C5458"/>
+              <a:defRPr sz="800" b="1" i="0" u="none" strike="noStrike">
+                <a:solidFill>
+                  <a:srgbClr val="1F1B1D"/>
                 </a:solidFill>
                 <a:latin typeface="+mn-lt"/>
               </a:defRPr>
@@ -1757,24 +1802,15 @@
         </c:scaling>
         <c:delete val="0"/>
         <c:axPos val="b"/>
-        <c:majorGridlines>
-          <c:spPr>
-            <a:ln w="6350" cap="flat">
-              <a:solidFill>
-                <a:srgbClr val="E6E2E4"/>
-              </a:solidFill>
-              <a:prstDash val="solid"/>
-              <a:round/>
-            </a:ln>
-          </c:spPr>
-        </c:majorGridlines>
         <c:numFmt formatCode="$#,##0,&quot;K&quot;" sourceLinked="0"/>
         <c:majorTickMark val="out"/>
         <c:minorTickMark val="none"/>
         <c:tickLblPos val="low"/>
         <c:spPr>
           <a:ln w="12700" cap="flat">
-            <a:noFill/>
+            <a:solidFill>
+              <a:srgbClr val="1F1B1D"/>
+            </a:solidFill>
             <a:prstDash val="solid"/>
             <a:round/>
           </a:ln>
@@ -1784,9 +1820,9 @@
           <a:lstStyle/>
           <a:p>
             <a:pPr>
-              <a:defRPr sz="900" b="0" i="0" u="none" strike="noStrike">
-                <a:solidFill>
-                  <a:srgbClr val="5C5458"/>
+              <a:defRPr sz="900" b="1" i="0" u="none" strike="noStrike">
+                <a:solidFill>
+                  <a:srgbClr val="1F1B1D"/>
                 </a:solidFill>
                 <a:latin typeface="+mn-lt"/>
               </a:defRPr>
@@ -1856,6 +1892,13 @@
             <a:solidFill>
               <a:srgbClr val="B9B2B6"/>
             </a:solidFill>
+            <a:ln w="6350" cap="flat">
+              <a:solidFill>
+                <a:srgbClr val="1F1B1D"/>
+              </a:solidFill>
+              <a:prstDash val="solid"/>
+              <a:round/>
+            </a:ln>
             <a:effectLst/>
           </c:spPr>
           <c:invertIfNegative val="0"/>
@@ -1866,9 +1909,9 @@
               <a:lstStyle/>
               <a:p>
                 <a:pPr>
-                  <a:defRPr b="0" i="0" strike="noStrike" sz="800" u="none">
+                  <a:defRPr b="1" i="0" strike="noStrike" sz="800" u="none">
                     <a:solidFill>
-                      <a:srgbClr val="5C5458"/>
+                      <a:srgbClr val="1F1B1D"/>
                     </a:solidFill>
                     <a:latin typeface="+mn-lt"/>
                   </a:defRPr>
@@ -1933,6 +1976,13 @@
             <a:solidFill>
               <a:srgbClr val="A03F7E"/>
             </a:solidFill>
+            <a:ln w="6350" cap="flat">
+              <a:solidFill>
+                <a:srgbClr val="1F1B1D"/>
+              </a:solidFill>
+              <a:prstDash val="solid"/>
+              <a:round/>
+            </a:ln>
             <a:effectLst/>
           </c:spPr>
           <c:invertIfNegative val="0"/>
@@ -1943,9 +1993,9 @@
               <a:lstStyle/>
               <a:p>
                 <a:pPr>
-                  <a:defRPr b="0" i="0" strike="noStrike" sz="800" u="none">
+                  <a:defRPr b="1" i="0" strike="noStrike" sz="800" u="none">
                     <a:solidFill>
-                      <a:srgbClr val="5C5458"/>
+                      <a:srgbClr val="1F1B1D"/>
                     </a:solidFill>
                     <a:latin typeface="+mn-lt"/>
                   </a:defRPr>
@@ -1999,9 +2049,9 @@
             <a:lstStyle/>
             <a:p>
               <a:pPr>
-                <a:defRPr b="0" i="0" strike="noStrike" sz="800" u="none">
+                <a:defRPr b="1" i="0" strike="noStrike" sz="800" u="none">
                   <a:solidFill>
-                    <a:srgbClr val="5C5458"/>
+                    <a:srgbClr val="1F1B1D"/>
                   </a:solidFill>
                   <a:latin typeface="+mn-lt"/>
                 </a:defRPr>
@@ -2036,7 +2086,7 @@
         <c:spPr>
           <a:ln w="12700" cap="flat">
             <a:solidFill>
-              <a:srgbClr val="888888"/>
+              <a:srgbClr val="1F1B1D"/>
             </a:solidFill>
             <a:prstDash val="solid"/>
             <a:round/>
@@ -2047,9 +2097,9 @@
           <a:lstStyle/>
           <a:p>
             <a:pPr>
-              <a:defRPr sz="900" b="0" i="0" u="none" strike="noStrike">
-                <a:solidFill>
-                  <a:srgbClr val="5C5458"/>
+              <a:defRPr sz="900" b="1" i="0" u="none" strike="noStrike">
+                <a:solidFill>
+                  <a:srgbClr val="1F1B1D"/>
                 </a:solidFill>
                 <a:latin typeface="+mn-lt"/>
               </a:defRPr>
@@ -2071,24 +2121,15 @@
         </c:scaling>
         <c:delete val="0"/>
         <c:axPos val="l"/>
-        <c:majorGridlines>
-          <c:spPr>
-            <a:ln w="6350" cap="flat">
-              <a:solidFill>
-                <a:srgbClr val="E6E2E4"/>
-              </a:solidFill>
-              <a:prstDash val="solid"/>
-              <a:round/>
-            </a:ln>
-          </c:spPr>
-        </c:majorGridlines>
         <c:numFmt formatCode="$#,##0.0,,&quot;M&quot;" sourceLinked="0"/>
         <c:majorTickMark val="out"/>
         <c:minorTickMark val="none"/>
         <c:tickLblPos val="nextTo"/>
         <c:spPr>
           <a:ln w="12700" cap="flat">
-            <a:noFill/>
+            <a:solidFill>
+              <a:srgbClr val="1F1B1D"/>
+            </a:solidFill>
             <a:prstDash val="solid"/>
             <a:round/>
           </a:ln>
@@ -2098,9 +2139,9 @@
           <a:lstStyle/>
           <a:p>
             <a:pPr>
-              <a:defRPr sz="900" b="0" i="0" u="none" strike="noStrike">
-                <a:solidFill>
-                  <a:srgbClr val="5C5458"/>
+              <a:defRPr sz="900" b="1" i="0" u="none" strike="noStrike">
+                <a:solidFill>
+                  <a:srgbClr val="1F1B1D"/>
                 </a:solidFill>
                 <a:latin typeface="+mn-lt"/>
               </a:defRPr>
@@ -2190,6 +2231,13 @@
             <a:solidFill>
               <a:srgbClr val="B8810C"/>
             </a:solidFill>
+            <a:ln w="6350" cap="flat">
+              <a:solidFill>
+                <a:srgbClr val="1F1B1D"/>
+              </a:solidFill>
+              <a:prstDash val="solid"/>
+              <a:round/>
+            </a:ln>
             <a:effectLst/>
           </c:spPr>
           <c:invertIfNegative val="0"/>
@@ -2200,9 +2248,9 @@
               <a:lstStyle/>
               <a:p>
                 <a:pPr>
-                  <a:defRPr b="0" i="0" strike="noStrike" sz="800" u="none">
+                  <a:defRPr b="1" i="0" strike="noStrike" sz="800" u="none">
                     <a:solidFill>
-                      <a:srgbClr val="5C5458"/>
+                      <a:srgbClr val="1F1B1D"/>
                     </a:solidFill>
                     <a:latin typeface="+mn-lt"/>
                   </a:defRPr>
@@ -2364,9 +2412,9 @@
             <a:lstStyle/>
             <a:p>
               <a:pPr>
-                <a:defRPr b="0" i="0" strike="noStrike" sz="800" u="none">
+                <a:defRPr b="1" i="0" strike="noStrike" sz="800" u="none">
                   <a:solidFill>
-                    <a:srgbClr val="5C5458"/>
+                    <a:srgbClr val="1F1B1D"/>
                   </a:solidFill>
                   <a:latin typeface="+mn-lt"/>
                 </a:defRPr>
@@ -2401,7 +2449,7 @@
         <c:spPr>
           <a:ln w="12700" cap="flat">
             <a:solidFill>
-              <a:srgbClr val="888888"/>
+              <a:srgbClr val="1F1B1D"/>
             </a:solidFill>
             <a:prstDash val="solid"/>
             <a:round/>
@@ -2412,9 +2460,9 @@
           <a:lstStyle/>
           <a:p>
             <a:pPr>
-              <a:defRPr sz="800" b="0" i="0" u="none" strike="noStrike">
-                <a:solidFill>
-                  <a:srgbClr val="5C5458"/>
+              <a:defRPr sz="800" b="1" i="0" u="none" strike="noStrike">
+                <a:solidFill>
+                  <a:srgbClr val="1F1B1D"/>
                 </a:solidFill>
                 <a:latin typeface="+mn-lt"/>
               </a:defRPr>
@@ -2436,24 +2484,15 @@
         </c:scaling>
         <c:delete val="0"/>
         <c:axPos val="b"/>
-        <c:majorGridlines>
-          <c:spPr>
-            <a:ln w="6350" cap="flat">
-              <a:solidFill>
-                <a:srgbClr val="E6E2E4"/>
-              </a:solidFill>
-              <a:prstDash val="solid"/>
-              <a:round/>
-            </a:ln>
-          </c:spPr>
-        </c:majorGridlines>
         <c:numFmt formatCode="0%" sourceLinked="0"/>
         <c:majorTickMark val="out"/>
         <c:minorTickMark val="none"/>
         <c:tickLblPos val="low"/>
         <c:spPr>
           <a:ln w="12700" cap="flat">
-            <a:noFill/>
+            <a:solidFill>
+              <a:srgbClr val="1F1B1D"/>
+            </a:solidFill>
             <a:prstDash val="solid"/>
             <a:round/>
           </a:ln>
@@ -2463,9 +2502,9 @@
           <a:lstStyle/>
           <a:p>
             <a:pPr>
-              <a:defRPr sz="900" b="0" i="0" u="none" strike="noStrike">
-                <a:solidFill>
-                  <a:srgbClr val="5C5458"/>
+              <a:defRPr sz="900" b="1" i="0" u="none" strike="noStrike">
+                <a:solidFill>
+                  <a:srgbClr val="1F1B1D"/>
                 </a:solidFill>
                 <a:latin typeface="+mn-lt"/>
               </a:defRPr>
@@ -2535,6 +2574,13 @@
             <a:solidFill>
               <a:srgbClr val="B8810C"/>
             </a:solidFill>
+            <a:ln w="6350" cap="flat">
+              <a:solidFill>
+                <a:srgbClr val="1F1B1D"/>
+              </a:solidFill>
+              <a:prstDash val="solid"/>
+              <a:round/>
+            </a:ln>
             <a:effectLst/>
           </c:spPr>
           <c:invertIfNegative val="0"/>
@@ -2545,9 +2591,9 @@
               <a:lstStyle/>
               <a:p>
                 <a:pPr>
-                  <a:defRPr b="0" i="0" strike="noStrike" sz="800" u="none">
+                  <a:defRPr b="1" i="0" strike="noStrike" sz="800" u="none">
                     <a:solidFill>
-                      <a:srgbClr val="5C5458"/>
+                      <a:srgbClr val="1F1B1D"/>
                     </a:solidFill>
                     <a:latin typeface="+mn-lt"/>
                   </a:defRPr>
@@ -2673,9 +2719,9 @@
             <a:lstStyle/>
             <a:p>
               <a:pPr>
-                <a:defRPr b="0" i="0" strike="noStrike" sz="800" u="none">
+                <a:defRPr b="1" i="0" strike="noStrike" sz="800" u="none">
                   <a:solidFill>
-                    <a:srgbClr val="5C5458"/>
+                    <a:srgbClr val="1F1B1D"/>
                   </a:solidFill>
                   <a:latin typeface="+mn-lt"/>
                 </a:defRPr>
@@ -2710,7 +2756,7 @@
         <c:spPr>
           <a:ln w="12700" cap="flat">
             <a:solidFill>
-              <a:srgbClr val="888888"/>
+              <a:srgbClr val="1F1B1D"/>
             </a:solidFill>
             <a:prstDash val="solid"/>
             <a:round/>
@@ -2721,9 +2767,9 @@
           <a:lstStyle/>
           <a:p>
             <a:pPr>
-              <a:defRPr sz="800" b="0" i="0" u="none" strike="noStrike">
-                <a:solidFill>
-                  <a:srgbClr val="5C5458"/>
+              <a:defRPr sz="800" b="1" i="0" u="none" strike="noStrike">
+                <a:solidFill>
+                  <a:srgbClr val="1F1B1D"/>
                 </a:solidFill>
                 <a:latin typeface="+mn-lt"/>
               </a:defRPr>
@@ -2745,24 +2791,15 @@
         </c:scaling>
         <c:delete val="0"/>
         <c:axPos val="b"/>
-        <c:majorGridlines>
-          <c:spPr>
-            <a:ln w="6350" cap="flat">
-              <a:solidFill>
-                <a:srgbClr val="E6E2E4"/>
-              </a:solidFill>
-              <a:prstDash val="solid"/>
-              <a:round/>
-            </a:ln>
-          </c:spPr>
-        </c:majorGridlines>
         <c:numFmt formatCode="0" sourceLinked="0"/>
         <c:majorTickMark val="out"/>
         <c:minorTickMark val="none"/>
         <c:tickLblPos val="low"/>
         <c:spPr>
           <a:ln w="12700" cap="flat">
-            <a:noFill/>
+            <a:solidFill>
+              <a:srgbClr val="1F1B1D"/>
+            </a:solidFill>
             <a:prstDash val="solid"/>
             <a:round/>
           </a:ln>
@@ -2772,9 +2809,9 @@
           <a:lstStyle/>
           <a:p>
             <a:pPr>
-              <a:defRPr sz="900" b="0" i="0" u="none" strike="noStrike">
-                <a:solidFill>
-                  <a:srgbClr val="5C5458"/>
+              <a:defRPr sz="900" b="1" i="0" u="none" strike="noStrike">
+                <a:solidFill>
+                  <a:srgbClr val="1F1B1D"/>
                 </a:solidFill>
                 <a:latin typeface="+mn-lt"/>
               </a:defRPr>
@@ -2844,6 +2881,13 @@
             <a:solidFill>
               <a:srgbClr val="B8810C"/>
             </a:solidFill>
+            <a:ln w="6350" cap="flat">
+              <a:solidFill>
+                <a:srgbClr val="1F1B1D"/>
+              </a:solidFill>
+              <a:prstDash val="solid"/>
+              <a:round/>
+            </a:ln>
             <a:effectLst/>
           </c:spPr>
           <c:invertIfNegative val="0"/>
@@ -2854,9 +2898,9 @@
               <a:lstStyle/>
               <a:p>
                 <a:pPr>
-                  <a:defRPr b="0" i="0" strike="noStrike" sz="800" u="none">
+                  <a:defRPr b="1" i="0" strike="noStrike" sz="800" u="none">
                     <a:solidFill>
-                      <a:srgbClr val="5C5458"/>
+                      <a:srgbClr val="1F1B1D"/>
                     </a:solidFill>
                     <a:latin typeface="+mn-lt"/>
                   </a:defRPr>
@@ -2952,9 +2996,9 @@
             <a:lstStyle/>
             <a:p>
               <a:pPr>
-                <a:defRPr b="0" i="0" strike="noStrike" sz="800" u="none">
+                <a:defRPr b="1" i="0" strike="noStrike" sz="800" u="none">
                   <a:solidFill>
-                    <a:srgbClr val="5C5458"/>
+                    <a:srgbClr val="1F1B1D"/>
                   </a:solidFill>
                   <a:latin typeface="+mn-lt"/>
                 </a:defRPr>
@@ -2989,7 +3033,7 @@
         <c:spPr>
           <a:ln w="12700" cap="flat">
             <a:solidFill>
-              <a:srgbClr val="888888"/>
+              <a:srgbClr val="1F1B1D"/>
             </a:solidFill>
             <a:prstDash val="solid"/>
             <a:round/>
@@ -3000,9 +3044,9 @@
           <a:lstStyle/>
           <a:p>
             <a:pPr>
-              <a:defRPr sz="800" b="0" i="0" u="none" strike="noStrike">
-                <a:solidFill>
-                  <a:srgbClr val="5C5458"/>
+              <a:defRPr sz="800" b="1" i="0" u="none" strike="noStrike">
+                <a:solidFill>
+                  <a:srgbClr val="1F1B1D"/>
                 </a:solidFill>
                 <a:latin typeface="+mn-lt"/>
               </a:defRPr>
@@ -3024,24 +3068,15 @@
         </c:scaling>
         <c:delete val="0"/>
         <c:axPos val="b"/>
-        <c:majorGridlines>
-          <c:spPr>
-            <a:ln w="6350" cap="flat">
-              <a:solidFill>
-                <a:srgbClr val="E6E2E4"/>
-              </a:solidFill>
-              <a:prstDash val="solid"/>
-              <a:round/>
-            </a:ln>
-          </c:spPr>
-        </c:majorGridlines>
         <c:numFmt formatCode="$#,##0,,&quot;M&quot;" sourceLinked="0"/>
         <c:majorTickMark val="out"/>
         <c:minorTickMark val="none"/>
         <c:tickLblPos val="low"/>
         <c:spPr>
           <a:ln w="12700" cap="flat">
-            <a:noFill/>
+            <a:solidFill>
+              <a:srgbClr val="1F1B1D"/>
+            </a:solidFill>
             <a:prstDash val="solid"/>
             <a:round/>
           </a:ln>
@@ -3051,9 +3086,9 @@
           <a:lstStyle/>
           <a:p>
             <a:pPr>
-              <a:defRPr sz="900" b="0" i="0" u="none" strike="noStrike">
-                <a:solidFill>
-                  <a:srgbClr val="5C5458"/>
+              <a:defRPr sz="900" b="1" i="0" u="none" strike="noStrike">
+                <a:solidFill>
+                  <a:srgbClr val="1F1B1D"/>
                 </a:solidFill>
                 <a:latin typeface="+mn-lt"/>
               </a:defRPr>

--- a/calvary_analysis/decks/leadership_deck.pptx
+++ b/calvary_analysis/decks/leadership_deck.pptx
@@ -132,13 +132,13 @@
   <p:extLst>
     <p:ext uri="{521415D9-36F7-43E2-AB2F-B90AF26B5E84}">
       <p14:sectionLst xmlns:p14="http://schemas.microsoft.com/office/powerpoint/2010/main">
-        <p14:section name="Opening" id="{074112d1-aca3-5fd5-c21e-b993ab713bcf}">
+        <p14:section name="Opening" id="{ff31aa56-fea2-8e3d-c1df-411163749fcd}">
           <p14:sldIdLst>
             <p14:sldId id="256"/>
             <p14:sldId id="257"/>
           </p14:sldIdLst>
         </p14:section>
-        <p14:section name="Where Calvary stands" id="{3a9c4021-a73e-1b72-b3ee-e3f06c96b284}">
+        <p14:section name="Where Calvary stands" id="{bd269e65-ca5f-249d-7acf-ae84a7b74c0d}">
           <p14:sldIdLst>
             <p14:sldId id="258"/>
             <p14:sldId id="259"/>
@@ -147,7 +147,7 @@
             <p14:sldId id="262"/>
           </p14:sldIdLst>
         </p14:section>
-        <p14:section name="The clouds on the horizon" id="{09f2bee3-60bd-f586-ad59-9db2c48f5bce}">
+        <p14:section name="The clouds on the horizon" id="{acc4d6ff-3093-6cd2-a02d-4508b49de080}">
           <p14:sldIdLst>
             <p14:sldId id="263"/>
             <p14:sldId id="264"/>
@@ -155,21 +155,21 @@
             <p14:sldId id="266"/>
           </p14:sldIdLst>
         </p14:section>
-        <p14:section name="What peers show" id="{0f7fe5ae-b84d-829f-4715-51b8b01bef5e}">
+        <p14:section name="What peers show" id="{493280a4-5952-a761-0bfd-db774da26c03}">
           <p14:sldIdLst>
             <p14:sldId id="267"/>
             <p14:sldId id="268"/>
             <p14:sldId id="269"/>
           </p14:sldIdLst>
         </p14:section>
-        <p14:section name="Where the opportunities are" id="{fb277776-9ffe-81c8-d297-ada61bcea97b}">
+        <p14:section name="Where the opportunities are" id="{6792c2b1-4e5d-4735-8947-7a44d8217f7a}">
           <p14:sldIdLst>
             <p14:sldId id="270"/>
             <p14:sldId id="271"/>
             <p14:sldId id="272"/>
           </p14:sldIdLst>
         </p14:section>
-        <p14:section name="A plan to consider" id="{debf9b30-f549-2cd1-b0f0-c112c498fd4e}">
+        <p14:section name="A plan to consider" id="{cc34b369-e507-bd07-1e0e-f5aa4dd6bcbd}">
           <p14:sldIdLst>
             <p14:sldId id="273"/>
             <p14:sldId id="274"/>
@@ -179,7 +179,7 @@
             <p14:sldId id="278"/>
           </p14:sldIdLst>
         </p14:section>
-        <p14:section name="Closing" id="{e1627e31-f013-1700-c443-e62003f208ad}">
+        <p14:section name="Closing" id="{de6e0952-b3fa-d1db-1194-86fa3997365a}">
           <p14:sldIdLst>
             <p14:sldId id="279"/>
             <p14:sldId id="280"/>
@@ -1793,6 +1793,7 @@
         <c:auto val="1"/>
         <c:lblAlgn val="ctr"/>
         <c:noMultiLvlLbl val="1"/>
+        <c:tickLblSkip val="1"/>
       </c:catAx>
       <c:valAx>
         <c:axId val="2094734552"/>
@@ -2308,10 +2309,10 @@
                     <c:v>N Street Village</c:v>
                   </c:pt>
                   <c:pt idx="12">
-                    <c:v>Doorways (VA)</c:v>
+                    <c:v>My Sister's Place</c:v>
                   </c:pt>
                   <c:pt idx="13">
-                    <c:v>My Sister's Place</c:v>
+                    <c:v>Doorways (VA)</c:v>
                   </c:pt>
                   <c:pt idx="14">
                     <c:v>House of Ruth DC</c:v>
@@ -2378,10 +2379,10 @@
                   <c:v>0.06448252267815789</c:v>
                 </c:pt>
                 <c:pt idx="12">
-                  <c:v>0.07162907637971937</c:v>
+                  <c:v>0.071595459638032</c:v>
                 </c:pt>
                 <c:pt idx="13">
-                  <c:v>0.07576576567177302</c:v>
+                  <c:v>0.07162907637971937</c:v>
                 </c:pt>
                 <c:pt idx="14">
                   <c:v>0.07707970031580223</c:v>
@@ -2475,6 +2476,7 @@
         <c:auto val="1"/>
         <c:lblAlgn val="ctr"/>
         <c:noMultiLvlLbl val="1"/>
+        <c:tickLblSkip val="1"/>
       </c:catAx>
       <c:valAx>
         <c:axId val="2094734552"/>
@@ -2610,51 +2612,54 @@
           </c:dLbls>
           <c:cat>
             <c:multiLvlStrRef>
-              <c:f>Sheet1!$A$2:$A$15</c:f>
+              <c:f>Sheet1!$A$2:$A$16</c:f>
               <c:multiLvlStrCache>
-                <c:ptCount val="14"/>
+                <c:ptCount val="15"/>
                 <c:lvl>
                   <c:pt idx="0">
-                    <c:v>The Washington Home</c:v>
+                    <c:v>Heart Sing *</c:v>
                   </c:pt>
                   <c:pt idx="1">
-                    <c:v>Diane &amp; Norman Bernstein Foundation</c:v>
+                    <c:v>Melamed Foundation *</c:v>
                   </c:pt>
                   <c:pt idx="2">
-                    <c:v>Naomi And Nehemiah Cohen Foundation…</c:v>
+                    <c:v>J V Schiro-Zavela Foundation *</c:v>
                   </c:pt>
                   <c:pt idx="3">
+                    <c:v>Adele M Thomas Charitable Foundation *</c:v>
+                  </c:pt>
+                  <c:pt idx="4">
+                    <c:v>Jerome A And Deena L Kaplan Family… *</c:v>
+                  </c:pt>
+                  <c:pt idx="5">
+                    <c:v>Pew Charitable Trusts *</c:v>
+                  </c:pt>
+                  <c:pt idx="6">
+                    <c:v>Alisann And Terry Collins Foundation *</c:v>
+                  </c:pt>
+                  <c:pt idx="7">
+                    <c:v>Jack R Anderson Foundation *</c:v>
+                  </c:pt>
+                  <c:pt idx="8">
+                    <c:v>Ralph S And Frances R Dweck Family… *</c:v>
+                  </c:pt>
+                  <c:pt idx="9">
+                    <c:v>The Washington Home *</c:v>
+                  </c:pt>
+                  <c:pt idx="10">
+                    <c:v>Diane &amp; Norman Bernstein Foundation *</c:v>
+                  </c:pt>
+                  <c:pt idx="11">
+                    <c:v>Naomi And Nehemiah Cohen Foundation… *</c:v>
+                  </c:pt>
+                  <c:pt idx="12">
                     <c:v>Brendan &amp; Helen Bechtel Foundation</c:v>
                   </c:pt>
-                  <c:pt idx="4">
+                  <c:pt idx="13">
                     <c:v>Bunting Family Foundation</c:v>
                   </c:pt>
-                  <c:pt idx="5">
+                  <c:pt idx="14">
                     <c:v>Robert I Schattner Foundation</c:v>
-                  </c:pt>
-                  <c:pt idx="6">
-                    <c:v>Give Lively Foundation</c:v>
-                  </c:pt>
-                  <c:pt idx="7">
-                    <c:v>Clark Charitable Foundation</c:v>
-                  </c:pt>
-                  <c:pt idx="8">
-                    <c:v>Jpmorgan Chase Foundation</c:v>
-                  </c:pt>
-                  <c:pt idx="9">
-                    <c:v>Americas Charities</c:v>
-                  </c:pt>
-                  <c:pt idx="10">
-                    <c:v>Capital Area Food Bank</c:v>
-                  </c:pt>
-                  <c:pt idx="11">
-                    <c:v>Gifts For The Homeless</c:v>
-                  </c:pt>
-                  <c:pt idx="12">
-                    <c:v>T Rowe Price Program For Charitable Giving</c:v>
-                  </c:pt>
-                  <c:pt idx="13">
-                    <c:v>Venable Baetjer And Howard Foundation</c:v>
                   </c:pt>
                 </c:lvl>
               </c:multiLvlStrCache>
@@ -2662,10 +2667,10 @@
           </c:cat>
           <c:val>
             <c:numRef>
-              <c:f>Sheet1!$B$2:$B$15</c:f>
+              <c:f>Sheet1!$B$2:$B$16</c:f>
               <c:numCache>
                 <c:formatCode>General</c:formatCode>
-                <c:ptCount val="14"/>
+                <c:ptCount val="15"/>
                 <c:pt idx="0">
                   <c:v>3</c:v>
                 </c:pt>
@@ -2676,37 +2681,40 @@
                   <c:v>3</c:v>
                 </c:pt>
                 <c:pt idx="3">
+                  <c:v>3</c:v>
+                </c:pt>
+                <c:pt idx="4">
+                  <c:v>3</c:v>
+                </c:pt>
+                <c:pt idx="5">
+                  <c:v>3</c:v>
+                </c:pt>
+                <c:pt idx="6">
+                  <c:v>3</c:v>
+                </c:pt>
+                <c:pt idx="7">
+                  <c:v>3</c:v>
+                </c:pt>
+                <c:pt idx="8">
+                  <c:v>3</c:v>
+                </c:pt>
+                <c:pt idx="9">
+                  <c:v>3</c:v>
+                </c:pt>
+                <c:pt idx="10">
+                  <c:v>3</c:v>
+                </c:pt>
+                <c:pt idx="11">
+                  <c:v>3</c:v>
+                </c:pt>
+                <c:pt idx="12">
                   <c:v>4</c:v>
                 </c:pt>
-                <c:pt idx="4">
+                <c:pt idx="13">
                   <c:v>4</c:v>
                 </c:pt>
-                <c:pt idx="5">
+                <c:pt idx="14">
                   <c:v>4</c:v>
-                </c:pt>
-                <c:pt idx="6">
-                  <c:v>5</c:v>
-                </c:pt>
-                <c:pt idx="7">
-                  <c:v>5</c:v>
-                </c:pt>
-                <c:pt idx="8">
-                  <c:v>7</c:v>
-                </c:pt>
-                <c:pt idx="9">
-                  <c:v>7</c:v>
-                </c:pt>
-                <c:pt idx="10">
-                  <c:v>7</c:v>
-                </c:pt>
-                <c:pt idx="11">
-                  <c:v>8</c:v>
-                </c:pt>
-                <c:pt idx="12">
-                  <c:v>8</c:v>
-                </c:pt>
-                <c:pt idx="13">
-                  <c:v>10</c:v>
                 </c:pt>
               </c:numCache>
             </c:numRef>
@@ -2782,6 +2790,7 @@
         <c:auto val="1"/>
         <c:lblAlgn val="ctr"/>
         <c:noMultiLvlLbl val="1"/>
+        <c:tickLblSkip val="1"/>
       </c:catAx>
       <c:valAx>
         <c:axId val="2094734552"/>
@@ -3059,6 +3068,7 @@
         <c:auto val="1"/>
         <c:lblAlgn val="ctr"/>
         <c:noMultiLvlLbl val="1"/>
+        <c:tickLblSkip val="1"/>
       </c:catAx>
       <c:valAx>
         <c:axId val="2094734552"/>
@@ -7517,7 +7527,7 @@
                           <a:ea typeface="Arial" pitchFamily="34" charset="-122"/>
                           <a:cs typeface="Arial" pitchFamily="34" charset="-120"/>
                         </a:rPr>
-                        <a:t>−$67K</a:t>
+                        <a:t>−$67K to −$100K</a:t>
                       </a:r>
                       <a:endParaRPr lang="en-US" sz="1100" dirty="0">
                         <a:latin typeface="Arial" charset="0"/>
@@ -7582,7 +7592,7 @@
                           <a:ea typeface="Arial" pitchFamily="34" charset="-122"/>
                           <a:cs typeface="Arial" pitchFamily="34" charset="-120"/>
                         </a:rPr>
-                        <a:t>1%</a:t>
+                        <a:t>1–2%</a:t>
                       </a:r>
                       <a:endParaRPr lang="en-US" sz="1100" dirty="0">
                         <a:latin typeface="Arial" charset="0"/>
@@ -7647,7 +7657,7 @@
                           <a:ea typeface="Arial" pitchFamily="34" charset="-122"/>
                           <a:cs typeface="Arial" pitchFamily="34" charset="-120"/>
                         </a:rPr>
-                        <a:t>−$675K</a:t>
+                        <a:t>−$675K to −$707K</a:t>
                       </a:r>
                       <a:endParaRPr lang="en-US" sz="1100" dirty="0">
                         <a:latin typeface="Arial" charset="0"/>
@@ -7712,7 +7722,7 @@
                           <a:ea typeface="Arial" pitchFamily="34" charset="-122"/>
                           <a:cs typeface="Arial" pitchFamily="34" charset="-120"/>
                         </a:rPr>
-                        <a:t>3.1</a:t>
+                        <a:t>3.0–3.1</a:t>
                       </a:r>
                       <a:endParaRPr lang="en-US" sz="1100" dirty="0">
                         <a:latin typeface="Arial" charset="0"/>
@@ -7844,7 +7854,7 @@
                           <a:ea typeface="Arial" pitchFamily="34" charset="-122"/>
                           <a:cs typeface="Arial" pitchFamily="34" charset="-120"/>
                         </a:rPr>
-                        <a:t>−$168K</a:t>
+                        <a:t>−$168K to −$250K</a:t>
                       </a:r>
                       <a:endParaRPr lang="en-US" sz="1100" dirty="0">
                         <a:latin typeface="Arial" charset="0"/>
@@ -7909,7 +7919,7 @@
                           <a:ea typeface="Arial" pitchFamily="34" charset="-122"/>
                           <a:cs typeface="Arial" pitchFamily="34" charset="-120"/>
                         </a:rPr>
-                        <a:t>3%</a:t>
+                        <a:t>3–5%</a:t>
                       </a:r>
                       <a:endParaRPr lang="en-US" sz="1100" dirty="0">
                         <a:latin typeface="Arial" charset="0"/>
@@ -7974,7 +7984,7 @@
                           <a:ea typeface="Arial" pitchFamily="34" charset="-122"/>
                           <a:cs typeface="Arial" pitchFamily="34" charset="-120"/>
                         </a:rPr>
-                        <a:t>−$776K</a:t>
+                        <a:t>−$776K to −$857K</a:t>
                       </a:r>
                       <a:endParaRPr lang="en-US" sz="1100" dirty="0">
                         <a:latin typeface="Arial" charset="0"/>
@@ -8039,7 +8049,7 @@
                           <a:ea typeface="Arial" pitchFamily="34" charset="-122"/>
                           <a:cs typeface="Arial" pitchFamily="34" charset="-120"/>
                         </a:rPr>
-                        <a:t>3.0</a:t>
+                        <a:t>2.9–3.0</a:t>
                       </a:r>
                       <a:endParaRPr lang="en-US" sz="1100" dirty="0">
                         <a:latin typeface="Arial" charset="0"/>
@@ -8171,7 +8181,7 @@
                           <a:ea typeface="Arial" pitchFamily="34" charset="-122"/>
                           <a:cs typeface="Arial" pitchFamily="34" charset="-120"/>
                         </a:rPr>
-                        <a:t>−$178K</a:t>
+                        <a:t>−$99K to −$207K</a:t>
                       </a:r>
                       <a:endParaRPr lang="en-US" sz="1100" dirty="0">
                         <a:latin typeface="Arial" charset="0"/>
@@ -8236,7 +8246,7 @@
                           <a:ea typeface="Arial" pitchFamily="34" charset="-122"/>
                           <a:cs typeface="Arial" pitchFamily="34" charset="-120"/>
                         </a:rPr>
-                        <a:t>4%</a:t>
+                        <a:t>2–4%</a:t>
                       </a:r>
                       <a:endParaRPr lang="en-US" sz="1100" dirty="0">
                         <a:latin typeface="Arial" charset="0"/>
@@ -8301,7 +8311,7 @@
                           <a:ea typeface="Arial" pitchFamily="34" charset="-122"/>
                           <a:cs typeface="Arial" pitchFamily="34" charset="-120"/>
                         </a:rPr>
-                        <a:t>−$785K</a:t>
+                        <a:t>−$707K to −$814K</a:t>
                       </a:r>
                       <a:endParaRPr lang="en-US" sz="1100" dirty="0">
                         <a:latin typeface="Arial" charset="0"/>
@@ -8366,7 +8376,7 @@
                           <a:ea typeface="Arial" pitchFamily="34" charset="-122"/>
                           <a:cs typeface="Arial" pitchFamily="34" charset="-120"/>
                         </a:rPr>
-                        <a:t>2.9</a:t>
+                        <a:t>2.9–3.0</a:t>
                       </a:r>
                       <a:endParaRPr lang="en-US" sz="1100" dirty="0">
                         <a:latin typeface="Arial" charset="0"/>
@@ -8498,7 +8508,7 @@
                           <a:ea typeface="Arial" pitchFamily="34" charset="-122"/>
                           <a:cs typeface="Arial" pitchFamily="34" charset="-120"/>
                         </a:rPr>
-                        <a:t>−$366K</a:t>
+                        <a:t>−$204K to −$424K</a:t>
                       </a:r>
                       <a:endParaRPr lang="en-US" sz="1100" dirty="0">
                         <a:latin typeface="Arial" charset="0"/>
@@ -8563,7 +8573,7 @@
                           <a:ea typeface="Arial" pitchFamily="34" charset="-122"/>
                           <a:cs typeface="Arial" pitchFamily="34" charset="-120"/>
                         </a:rPr>
-                        <a:t>7%</a:t>
+                        <a:t>4–9%</a:t>
                       </a:r>
                       <a:endParaRPr lang="en-US" sz="1100" dirty="0">
                         <a:latin typeface="Arial" charset="0"/>
@@ -8628,7 +8638,7 @@
                           <a:ea typeface="Arial" pitchFamily="34" charset="-122"/>
                           <a:cs typeface="Arial" pitchFamily="34" charset="-120"/>
                         </a:rPr>
-                        <a:t>−$973K</a:t>
+                        <a:t>−$811K to −$1,032K</a:t>
                       </a:r>
                       <a:endParaRPr lang="en-US" sz="1100" dirty="0">
                         <a:latin typeface="Arial" charset="0"/>
@@ -8693,7 +8703,7 @@
                           <a:ea typeface="Arial" pitchFamily="34" charset="-122"/>
                           <a:cs typeface="Arial" pitchFamily="34" charset="-120"/>
                         </a:rPr>
-                        <a:t>2.7</a:t>
+                        <a:t>2.7–2.9</a:t>
                       </a:r>
                       <a:endParaRPr lang="en-US" sz="1100" dirty="0">
                         <a:latin typeface="Arial" charset="0"/>
@@ -8825,7 +8835,7 @@
                           <a:ea typeface="Arial" pitchFamily="34" charset="-122"/>
                           <a:cs typeface="Arial" pitchFamily="34" charset="-120"/>
                         </a:rPr>
-                        <a:t>−$960K</a:t>
+                        <a:t>−$650K to −$1,125K</a:t>
                       </a:r>
                       <a:endParaRPr lang="en-US" sz="1100" dirty="0">
                         <a:latin typeface="Arial" charset="0"/>
@@ -8890,7 +8900,7 @@
                           <a:ea typeface="Arial" pitchFamily="34" charset="-122"/>
                           <a:cs typeface="Arial" pitchFamily="34" charset="-120"/>
                         </a:rPr>
-                        <a:t>19%</a:t>
+                        <a:t>13–23%</a:t>
                       </a:r>
                       <a:endParaRPr lang="en-US" sz="1100" dirty="0">
                         <a:latin typeface="Arial" charset="0"/>
@@ -8955,7 +8965,7 @@
                           <a:ea typeface="Arial" pitchFamily="34" charset="-122"/>
                           <a:cs typeface="Arial" pitchFamily="34" charset="-120"/>
                         </a:rPr>
-                        <a:t>−$1,567K</a:t>
+                        <a:t>−$1,257K to −$1,733K</a:t>
                       </a:r>
                       <a:endParaRPr lang="en-US" sz="1100" dirty="0">
                         <a:latin typeface="Arial" charset="0"/>
@@ -9020,7 +9030,7 @@
                           <a:ea typeface="Arial" pitchFamily="34" charset="-122"/>
                           <a:cs typeface="Arial" pitchFamily="34" charset="-120"/>
                         </a:rPr>
-                        <a:t>2.1</a:t>
+                        <a:t>1.9–2.4</a:t>
                       </a:r>
                       <a:endParaRPr lang="en-US" sz="1100" dirty="0">
                         <a:latin typeface="Arial" charset="0"/>
@@ -9152,7 +9162,7 @@
                           <a:ea typeface="Arial" pitchFamily="34" charset="-122"/>
                           <a:cs typeface="Arial" pitchFamily="34" charset="-120"/>
                         </a:rPr>
-                        <a:t>−$1,306K</a:t>
+                        <a:t>−$1,052K to −$1,474K</a:t>
                       </a:r>
                       <a:endParaRPr lang="en-US" sz="1100" dirty="0">
                         <a:latin typeface="Arial" charset="0"/>
@@ -9217,7 +9227,7 @@
                           <a:ea typeface="Arial" pitchFamily="34" charset="-122"/>
                           <a:cs typeface="Arial" pitchFamily="34" charset="-120"/>
                         </a:rPr>
-                        <a:t>26%</a:t>
+                        <a:t>21–30%</a:t>
                       </a:r>
                       <a:endParaRPr lang="en-US" sz="1100" dirty="0">
                         <a:latin typeface="Arial" charset="0"/>
@@ -9282,7 +9292,7 @@
                           <a:ea typeface="Arial" pitchFamily="34" charset="-122"/>
                           <a:cs typeface="Arial" pitchFamily="34" charset="-120"/>
                         </a:rPr>
-                        <a:t>−$1,914K</a:t>
+                        <a:t>−$1,659K to −$2,082K</a:t>
                       </a:r>
                       <a:endParaRPr lang="en-US" sz="1100" dirty="0">
                         <a:latin typeface="Arial" charset="0"/>
@@ -9347,7 +9357,7 @@
                           <a:ea typeface="Arial" pitchFamily="34" charset="-122"/>
                           <a:cs typeface="Arial" pitchFamily="34" charset="-120"/>
                         </a:rPr>
-                        <a:t>1.7</a:t>
+                        <a:t>1.5–2.0</a:t>
                       </a:r>
                       <a:endParaRPr lang="en-US" sz="1100" dirty="0">
                         <a:latin typeface="Arial" charset="0"/>
@@ -9430,7 +9440,7 @@
                   <a:srgbClr val="5C5458"/>
                 </a:solidFill>
               </a:rPr>
-              <a:t>Reading: an OVSJG cut of the size proposed in FY26 costs about $67K; a lost DHS/TCP contract costs about $960K. The net column assumes half of a lost stream's revenue is avoidable cost. Even the baseline burns cash at about $50K a month.</a:t>
+              <a:t>Reading: an OVSJG cut of the size proposed in FY26 costs about $67–100K; a lost DHS/TCP contract costs about $0.65–1.13M, depending on how revenue splits across streams. The net column assumes half of a lost stream's revenue is avoidable cost. Even the baseline burns cash at about $50K a month.</a:t>
             </a:r>
             <a:endParaRPr lang="en-US" sz="1250" dirty="0"/>
           </a:p>
@@ -9527,7 +9537,7 @@
                   <a:srgbClr val="8C8488"/>
                 </a:solidFill>
               </a:rPr>
-              <a:t>Method: FY25 recognized government revenue apportioned to streams by FY-aligned award ceilings; cuts applied to the apportioned amounts</a:t>
+              <a:t>Method: ranges across three splits of FY25 recognized government revenue (award-ceiling share; CoC at its audited FY22–23 draw rate; without Sisters Rise); a floor case nearly removes the DHS loss</a:t>
             </a:r>
             <a:endParaRPr lang="en-US" sz="850" dirty="0"/>
           </a:p>
@@ -9801,7 +9811,7 @@
                   <a:srgbClr val="1F1B1D"/>
                 </a:solidFill>
               </a:rPr>
-              <a:t>The DHS value is public for FY2024 only and is carried into FY25.</a:t>
+              <a:t>The audited FY22–23 years already show CoC spending at 28% and 58% of the prior year's CoC awards, so the gap starts in the CoC stream.</a:t>
             </a:r>
             <a:endParaRPr lang="en-US" sz="1150" dirty="0"/>
           </a:p>
@@ -9818,7 +9828,7 @@
                   <a:srgbClr val="41242F"/>
                 </a:solidFill>
               </a:rPr>
-              <a:t>The audits would settle it.</a:t>
+              <a:t>The audits would settle the rest.</a:t>
             </a:r>
             <a:endParaRPr lang="en-US" sz="1150" dirty="0"/>
           </a:p>
@@ -9883,7 +9893,7 @@
                   <a:srgbClr val="41242F"/>
                 </a:solidFill>
               </a:rPr>
-              <a:t>undrawn awards are the cheapest revenue there is, and a draw-down reconciliation is the first task in the 90-day plan.</a:t>
+              <a:t>undrawn awards are the cheapest revenue there is, so reconcile CoC draw-down first, then DHS.</a:t>
             </a:r>
             <a:endParaRPr lang="en-US" sz="1100" dirty="0"/>
           </a:p>
@@ -9933,7 +9943,7 @@
                   <a:srgbClr val="8C8488"/>
                 </a:solidFill>
               </a:rPr>
-              <a:t>Method: ratio = recognized government revenue ÷ sum of known award ceilings</a:t>
+              <a:t>Method: ratio = recognized government revenue ÷ sum of known award ceilings; CoC draw rate = single-audit SEFA expenditure ÷ prior-year CoC awards</a:t>
             </a:r>
             <a:endParaRPr lang="en-US" sz="850" dirty="0"/>
           </a:p>
@@ -10093,7 +10103,7 @@
                   <a:srgbClr val="FFDD7F"/>
                 </a:solidFill>
               </a:rPr>
-              <a:t>Organizations with Calvary's profile have grown on more than one model; the closest fit is to grow private support alongside a stable public base.</a:t>
+              <a:t>Organizations with Calvary's profile have grown on more than one model, and the closest fit is to grow private support alongside a stable public base.</a:t>
             </a:r>
             <a:endParaRPr lang="en-US" sz="1600" dirty="0"/>
           </a:p>
@@ -11111,7 +11121,7 @@
                   <a:srgbClr val="41242F"/>
                 </a:solidFill>
               </a:rPr>
-              <a:t>DMV funders give DC's sector $132M a year, and 23 of them already fund three or more of Calvary's peers.</a:t>
+              <a:t>DMV funders give DC's sector $132M a year, and 15 grantmakers already fund three or more of Calvary's peers.</a:t>
             </a:r>
             <a:endParaRPr lang="en-US" sz="2100" dirty="0"/>
           </a:p>
@@ -11135,7 +11145,7 @@
       </p:graphicFrame>
       <p:sp>
         <p:nvSpPr>
-          <p:cNvPr id="4" name="card Warm cold prospects"/>
+          <p:cNvPr id="4" name="card Who already funds Calvary's model"/>
           <p:cNvSpPr/>
           <p:nvPr/>
         </p:nvSpPr>
@@ -11188,7 +11198,7 @@
                   <a:srgbClr val="41242F"/>
                 </a:solidFill>
               </a:rPr>
-              <a:t>Warm cold prospects</a:t>
+              <a:t>Who already funds Calvary's model</a:t>
             </a:r>
             <a:endParaRPr lang="en-US" sz="1400" dirty="0"/>
           </a:p>
@@ -11222,14 +11232,14 @@
               <a:buNone/>
             </a:pPr>
             <a:r>
-              <a:rPr lang="en-US" sz="1150" b="1" dirty="0">
+              <a:rPr lang="en-US" sz="1100" b="1" dirty="0">
                 <a:solidFill>
                   <a:srgbClr val="41242F"/>
                 </a:solidFill>
               </a:rPr>
-              <a:t>$660M flowed to DC's sector in TY2020–24, 58% via donor-advised funds.</a:t>
-            </a:r>
-            <a:endParaRPr lang="en-US" sz="1150" dirty="0"/>
+              <a:t>$660M flowed to DC's sector in TY2020–24, 58% via donor-advised funds; Clark's spend-down, now closed, is part of it.</a:t>
+            </a:r>
+            <a:endParaRPr lang="en-US" sz="1100" dirty="0"/>
           </a:p>
           <a:p>
             <a:pPr indent="0" marL="0">
@@ -11239,14 +11249,14 @@
               <a:buNone/>
             </a:pPr>
             <a:r>
-              <a:rPr lang="en-US" sz="1150" b="1" dirty="0">
+              <a:rPr lang="en-US" sz="1100" b="1" dirty="0">
                 <a:solidFill>
                   <a:srgbClr val="41242F"/>
                 </a:solidFill>
               </a:rPr>
-              <a:t>Clark Charitable: $7.8M to five peers, median grant $250K, no Calvary grant yet.</a:t>
-            </a:r>
-            <a:endParaRPr lang="en-US" sz="1150" dirty="0"/>
+              <a:t>Of the 23 funders of three or more peers, 8 are giving channels or closed.</a:t>
+            </a:r>
+            <a:endParaRPr lang="en-US" sz="1100" dirty="0"/>
           </a:p>
           <a:p>
             <a:pPr marL="228600" indent="-228600">
@@ -11257,14 +11267,14 @@
               <a:buChar char="•"/>
             </a:pPr>
             <a:r>
-              <a:rPr lang="en-US" sz="1150" dirty="0">
+              <a:rPr lang="en-US" sz="1100" dirty="0">
                 <a:solidFill>
                   <a:srgbClr val="1F1B1D"/>
                 </a:solidFill>
               </a:rPr>
-              <a:t>Schattner, Cohen, Bernstein and The Washington Home each fund 3–4 peers at $25–75K.</a:t>
-            </a:r>
-            <a:endParaRPr lang="en-US" sz="1150" dirty="0"/>
+              <a:t>Schattner is the one checked target: Tier 1, invitation-only, so the route is an introduction through a peer it funds.</a:t>
+            </a:r>
+            <a:endParaRPr lang="en-US" sz="1100" dirty="0"/>
           </a:p>
           <a:p>
             <a:pPr marL="228600" indent="-228600">
@@ -11275,14 +11285,14 @@
               <a:buChar char="•"/>
             </a:pPr>
             <a:r>
-              <a:rPr lang="en-US" sz="1150" dirty="0">
+              <a:rPr lang="en-US" sz="1100" dirty="0">
                 <a:solidFill>
                   <a:srgbClr val="1F1B1D"/>
                 </a:solidFill>
               </a:rPr>
-              <a:t>Venable and America's Charities are already in Calvary's records; the filing gap is lag.</a:t>
-            </a:r>
-            <a:endParaRPr lang="en-US" sz="1150" dirty="0"/>
+              <a:t>The others are not yet plan targets: each needs an open-status check and the confirmed peer set (* funds exactly three peers).</a:t>
+            </a:r>
+            <a:endParaRPr lang="en-US" sz="1100" dirty="0"/>
           </a:p>
         </p:txBody>
       </p:sp>
@@ -11327,7 +11337,7 @@
                   <a:srgbClr val="41242F"/>
                 </a:solidFill>
               </a:rPr>
-              <a:t>these funders already fund Calvary's model, and the ask is an introduction, not a case for the cause.</a:t>
+              <a:t>these funders already fund Calvary's model, so confirming the peer set and each funder's status is the step before any introduction.</a:t>
             </a:r>
             <a:endParaRPr lang="en-US" sz="1100" dirty="0"/>
           </a:p>
@@ -11377,7 +11387,7 @@
                   <a:srgbClr val="8C8488"/>
                 </a:solidFill>
               </a:rPr>
-              <a:t>Method: gap = funder names 2+ core peers and no Calvary row in TY2020–24 filings; DAF sponsors excluded</a:t>
+              <a:t>Method: gap = funder names 3+ core peers and no Calvary row in TY2020–24 filings; DAF sponsors, giving channels and closed funders excluded; open status from funders' own pages, Oct 2026</a:t>
             </a:r>
             <a:endParaRPr lang="en-US" sz="850" dirty="0"/>
           </a:p>
@@ -11391,7 +11401,7 @@
                   <a:srgbClr val="8C8488"/>
                 </a:solidFill>
               </a:rPr>
-              <a:t>Chart m5_01, m4_01 · data as of 2026-10-10 · method note C1</a:t>
+              <a:t>Chart m5_01, m4_01, m7_04 · data as of 2026-10-10 · method note C1</a:t>
             </a:r>
             <a:endParaRPr lang="en-US" sz="850" dirty="0"/>
           </a:p>
@@ -11698,7 +11708,7 @@
                   <a:srgbClr val="1F1B1D"/>
                 </a:solidFill>
               </a:rPr>
-              <a:t>One high-confidence link, not a funder; introductions run through shared funders and peers.</a:t>
+              <a:t>No high-confidence board links; introductions run through shared funders and peers.</a:t>
             </a:r>
             <a:endParaRPr lang="en-US" sz="1050" dirty="0"/>
           </a:p>
@@ -11795,7 +11805,7 @@
                   <a:srgbClr val="8C8488"/>
                 </a:solidFill>
               </a:rPr>
-              <a:t>Method: bipartite funder–recipient graph; funders of 3+ organizations shown; high-confidence board links only in this deck</a:t>
+              <a:t>Method: bipartite funder–recipient graph; funders of 3+ organizations shown; board links count as high confidence only with overlapping board terms (none in public filings)</a:t>
             </a:r>
             <a:endParaRPr lang="en-US" sz="850" dirty="0"/>
           </a:p>
@@ -11955,7 +11965,7 @@
                   <a:srgbClr val="FFDD7F"/>
                 </a:solidFill>
               </a:rPr>
-              <a:t>Four fronts over 90 days, eleven named targets, and two policy choices for the board.</a:t>
+              <a:t>Four fronts over 90 days, nine named targets, and two policy choices for the board.</a:t>
             </a:r>
             <a:endParaRPr lang="en-US" sz="1600" dirty="0"/>
           </a:p>
@@ -12018,7 +12028,7 @@
                   <a:srgbClr val="41242F"/>
                 </a:solidFill>
               </a:rPr>
-              <a:t>We suggest a 90-day plan that draws every awarded dollar, upgrades partners, opens new foundations and restores the event line.</a:t>
+              <a:t>We suggest a 90-day plan to draw every awarded dollar, deepen partners, open doors through peers and grow individual giving.</a:t>
             </a:r>
             <a:endParaRPr lang="en-US" sz="2100" dirty="0"/>
           </a:p>
@@ -12136,7 +12146,7 @@
                   <a:srgbClr val="1F1B1D"/>
                 </a:solidFill>
               </a:rPr>
-              <a:t>Reconcile award ceilings to revenue for FY24–26</a:t>
+              <a:t>Reconcile CoC draw-down first (the audited years show the gap), then DHS</a:t>
             </a:r>
             <a:endParaRPr lang="en-US" sz="1200" dirty="0"/>
           </a:p>
@@ -12154,7 +12164,7 @@
                   <a:srgbClr val="1F1B1D"/>
                 </a:solidFill>
               </a:rPr>
-              <a:t>Confirm the DHS contract and Sisters Rise status with TCP</a:t>
+              <a:t>Confirm the DHS contract and Sisters Rise status with TCP (EHV ends 31 Dec 2026)</a:t>
             </a:r>
             <a:endParaRPr lang="en-US" sz="1200" dirty="0"/>
           </a:p>
@@ -12172,7 +12182,7 @@
                   <a:srgbClr val="1F1B1D"/>
                 </a:solidFill>
               </a:rPr>
-              <a:t>Defend the three CoC renewals; scope a PSH expansion project</a:t>
+              <a:t>Defend the three CoC renewals in the FY2026 competition</a:t>
             </a:r>
             <a:endParaRPr lang="en-US" sz="1200" dirty="0"/>
           </a:p>
@@ -12180,7 +12190,7 @@
       </p:sp>
       <p:sp>
         <p:nvSpPr>
-          <p:cNvPr id="6" name="card 2. Upgrade current partners"/>
+          <p:cNvPr id="6" name="card 2. Deepen current partners"/>
           <p:cNvSpPr/>
           <p:nvPr/>
         </p:nvSpPr>
@@ -12233,7 +12243,7 @@
                   <a:srgbClr val="41242F"/>
                 </a:solidFill>
               </a:rPr>
-              <a:t>2. Upgrade current partners</a:t>
+              <a:t>2. Deepen current partners</a:t>
             </a:r>
             <a:endParaRPr lang="en-US" sz="1400" dirty="0"/>
           </a:p>
@@ -12272,7 +12282,7 @@
                   <a:srgbClr val="41242F"/>
                 </a:solidFill>
               </a:rPr>
-              <a:t>Day 45</a:t>
+              <a:t>Day 45–60</a:t>
             </a:r>
             <a:endParaRPr lang="en-US" sz="1200" dirty="0"/>
           </a:p>
@@ -12290,7 +12300,7 @@
                   <a:srgbClr val="1F1B1D"/>
                 </a:solidFill>
               </a:rPr>
-              <a:t>Multi-year general-operating asks to GWCF, Cafritz, Abell, Fowler, United Way NCA, Bank of America</a:t>
+              <a:t>Cafritz and Fowler: multi-year general-operating asks (Cafritz: Mar 1, Jul 1, Nov 1)</a:t>
             </a:r>
             <a:endParaRPr lang="en-US" sz="1200" dirty="0"/>
           </a:p>
@@ -12308,7 +12318,7 @@
                   <a:srgbClr val="1F1B1D"/>
                 </a:solidFill>
               </a:rPr>
-              <a:t>Ask GWCF about a Health Equity Fund successor</a:t>
+              <a:t>GWCF: a Health Equity Fund successor and core support</a:t>
             </a:r>
             <a:endParaRPr lang="en-US" sz="1200" dirty="0"/>
           </a:p>
@@ -12326,7 +12336,7 @@
                   <a:srgbClr val="1F1B1D"/>
                 </a:solidFill>
               </a:rPr>
-              <a:t>Cafritz deadlines: Mar 1, Jul 1, Nov 1</a:t>
+              <a:t>Abell: steward and renew with its staff (invitation-only)</a:t>
             </a:r>
             <a:endParaRPr lang="en-US" sz="1200" dirty="0"/>
           </a:p>
@@ -12334,7 +12344,7 @@
       </p:sp>
       <p:sp>
         <p:nvSpPr>
-          <p:cNvPr id="9" name="card 3. Open new foundations"/>
+          <p:cNvPr id="9" name="card 3. Open doors through peers"/>
           <p:cNvSpPr/>
           <p:nvPr/>
         </p:nvSpPr>
@@ -12387,7 +12397,7 @@
                   <a:srgbClr val="41242F"/>
                 </a:solidFill>
               </a:rPr>
-              <a:t>3. Open new foundations</a:t>
+              <a:t>3. Open doors through peers</a:t>
             </a:r>
             <a:endParaRPr lang="en-US" sz="1400" dirty="0"/>
           </a:p>
@@ -12426,7 +12436,7 @@
                   <a:srgbClr val="41242F"/>
                 </a:solidFill>
               </a:rPr>
-              <a:t>Day 60–90</a:t>
+              <a:t>Day 90</a:t>
             </a:r>
             <a:endParaRPr lang="en-US" sz="1200" dirty="0"/>
           </a:p>
@@ -12444,7 +12454,7 @@
                   <a:srgbClr val="1F1B1D"/>
                 </a:solidFill>
               </a:rPr>
-              <a:t>Clark Charitable first, via the peers it funds</a:t>
+              <a:t>An introduction to Schattner through a peer it funds, then an invitation</a:t>
             </a:r>
             <a:endParaRPr lang="en-US" sz="1200" dirty="0"/>
           </a:p>
@@ -12462,7 +12472,7 @@
                   <a:srgbClr val="1F1B1D"/>
                 </a:solidFill>
               </a:rPr>
-              <a:t>Schattner, Cohen, Bernstein, The Washington Home</a:t>
+              <a:t>Meet Jane Bancroft Robinson's staff ahead of its next RFP</a:t>
             </a:r>
             <a:endParaRPr lang="en-US" sz="1200" dirty="0"/>
           </a:p>
@@ -12480,7 +12490,7 @@
                   <a:srgbClr val="1F1B1D"/>
                 </a:solidFill>
               </a:rPr>
-              <a:t>Re-engage Many Hands (January window), World Bank CCF, Jane Bancroft Robinson</a:t>
+              <a:t>Confirm the peer set before naming other prospects</a:t>
             </a:r>
             <a:endParaRPr lang="en-US" sz="1200" dirty="0"/>
           </a:p>
@@ -12488,7 +12498,7 @@
       </p:sp>
       <p:sp>
         <p:nvSpPr>
-          <p:cNvPr id="12" name="card 4. Restore the event line"/>
+          <p:cNvPr id="12" name="card 4. Grow individual giving"/>
           <p:cNvSpPr/>
           <p:nvPr/>
         </p:nvSpPr>
@@ -12541,7 +12551,7 @@
                   <a:srgbClr val="41242F"/>
                 </a:solidFill>
               </a:rPr>
-              <a:t>4. Restore the event line</a:t>
+              <a:t>4. Grow individual giving</a:t>
             </a:r>
             <a:endParaRPr lang="en-US" sz="1400" dirty="0"/>
           </a:p>
@@ -12580,7 +12590,7 @@
                   <a:srgbClr val="41242F"/>
                 </a:solidFill>
               </a:rPr>
-              <a:t>Day 45</a:t>
+              <a:t>Day 60</a:t>
             </a:r>
             <a:endParaRPr lang="en-US" sz="1200" dirty="0"/>
           </a:p>
@@ -12598,7 +12608,7 @@
                   <a:srgbClr val="1F1B1D"/>
                 </a:solidFill>
               </a:rPr>
-              <a:t>Confirm whether the FY25 gala moved across the fiscal year</a:t>
+              <a:t>Start a named major-gifts and DAF program</a:t>
             </a:r>
             <a:endParaRPr lang="en-US" sz="1200" dirty="0"/>
           </a:p>
@@ -12616,7 +12626,7 @@
                   <a:srgbClr val="1F1B1D"/>
                 </a:solidFill>
               </a:rPr>
-              <a:t>Set the FY26 event at the FY24 level ($538K)</a:t>
+              <a:t>Confirm the FY26 gala date (receipts held near $0.5M)</a:t>
             </a:r>
             <a:endParaRPr lang="en-US" sz="1200" dirty="0"/>
           </a:p>
@@ -12634,7 +12644,7 @@
                   <a:srgbClr val="1F1B1D"/>
                 </a:solidFill>
               </a:rPr>
-              <a:t>Start a named major-gifts and DAF program</a:t>
+              <a:t>Six fundraising staff: two partner conversations a fortnight</a:t>
             </a:r>
             <a:endParaRPr lang="en-US" sz="1200" dirty="0"/>
           </a:p>
@@ -12910,7 +12920,7 @@
                   <a:srgbClr val="1F1B1D"/>
                 </a:solidFill>
               </a:rPr>
-              <a:t>Revenue up 59% in real terms FY19→FY25; inventory 68 → 124 beds, 6.8% of DC's transitional-housing beds</a:t>
+              <a:t>Revenue up 59% after inflation FY19→FY25; 124 beds across three housing programs, its 94 transitional beds 6.8% of DC's</a:t>
             </a:r>
             <a:endParaRPr lang="en-US" sz="1800" dirty="0"/>
           </a:p>
@@ -12948,7 +12958,7 @@
                   <a:srgbClr val="41242F"/>
                 </a:solidFill>
               </a:rPr>
-              <a:t>Complication: the money arrives in a concentrated shape, private support has held flat, and FY25 thinned the cushion.</a:t>
+              <a:t>Complication: the money arrives in a concentrated shape, private support has held flat, and FY25 ended in deficit.</a:t>
             </a:r>
             <a:endParaRPr lang="en-US" sz="1800" dirty="0"/>
           </a:p>
@@ -12966,7 +12976,7 @@
                   <a:srgbClr val="1F1B1D"/>
                 </a:solidFill>
               </a:rPr>
-              <a:t>Three public streams, two through TCP, carry 74% of a $4.1M award base; the DHS contract is the largest and least documented</a:t>
+              <a:t>Three public streams carry a $4.1M award base, 78% of it through TCP; the DHS contract is the largest and least documented</a:t>
             </a:r>
             <a:endParaRPr lang="en-US" sz="1800" dirty="0"/>
           </a:p>
@@ -12984,7 +12994,7 @@
                   <a:srgbClr val="1F1B1D"/>
                 </a:solidFill>
               </a:rPr>
-              <a:t>Foundation grants steady at ~$1M a year, one partner 27%; FY25: −$607K, event income −$483K, 4.4 months of cash</a:t>
+              <a:t>Foundation grants steady at ~$1M a year, one partner 27%; FY25: −$607K and 4.4 months of cash, while event receipts held near $0.5M</a:t>
             </a:r>
             <a:endParaRPr lang="en-US" sz="1800" dirty="0"/>
           </a:p>
@@ -13002,7 +13012,7 @@
                   <a:srgbClr val="1F1B1D"/>
                 </a:solidFill>
               </a:rPr>
-              <a:t>Calvary recognized only about two-thirds of its known award ceilings as revenue in FY24–25</a:t>
+              <a:t>Calvary recognized about two-thirds of its known award ceilings in FY24–25, and the audited years show the gap began in the CoC stream</a:t>
             </a:r>
             <a:endParaRPr lang="en-US" sz="1800" dirty="0"/>
           </a:p>
@@ -13040,7 +13050,7 @@
                   <a:srgbClr val="1F1B1D"/>
                 </a:solidFill>
               </a:rPr>
-              <a:t>A 90-day plan on four fronts with eleven Tier 1 targets: upgrade GWCF, Cafritz, Abell, Fowler; open Clark, Schattner; confirm the TCP contracts</a:t>
+              <a:t>A 90-day plan on four fronts with nine Tier 1 targets: deepen GWCF, Cafritz, Abell and Fowler, an introduction to Schattner, and the TCP contracts</a:t>
             </a:r>
             <a:endParaRPr lang="en-US" sz="1800" dirty="0"/>
           </a:p>
@@ -13076,7 +13086,7 @@
                   <a:srgbClr val="1F1B1D"/>
                 </a:solidFill>
               </a:rPr>
-              <a:t>What we need from you: reactions, the FY24–25 audits, the TCP agreements, and the FY25 gala calendar</a:t>
+              <a:t>What we need from you: reactions, the FY24–25 audits and the TCP agreements</a:t>
             </a:r>
             <a:endParaRPr lang="en-US" sz="1800" dirty="0"/>
           </a:p>
@@ -13248,7 +13258,7 @@
                   <a:srgbClr val="41242F"/>
                 </a:solidFill>
               </a:rPr>
-              <a:t>Eleven Tier 1 targets come with a next step, an owner and a deadline.</a:t>
+              <a:t>Nine Tier 1 targets come with a next step, an owner and a deadline.</a:t>
             </a:r>
             <a:endParaRPr lang="en-US" sz="2100" dirty="0"/>
           </a:p>
@@ -13642,7 +13652,7 @@
                           <a:ea typeface="Arial" pitchFamily="34" charset="-122"/>
                           <a:cs typeface="Arial" pitchFamily="34" charset="-120"/>
                         </a:rPr>
-                        <a:t>Application cycle</a:t>
+                        <a:t>Open to new requests</a:t>
                       </a:r>
                       <a:endParaRPr lang="en-US" sz="950" dirty="0">
                         <a:latin typeface="Arial" charset="0"/>
@@ -13842,7 +13852,7 @@
                           <a:ea typeface="Arial" pitchFamily="34" charset="-122"/>
                           <a:cs typeface="Arial" pitchFamily="34" charset="-120"/>
                         </a:rPr>
-                        <a:t>Upgrade ask: request a multi-year general-operating grant at the funder's peer-level amount, citing the FY25 deficit and the three-stream exposure</a:t>
+                        <a:t>Steward and renew: Abell gave $270K (TY2021) and $25K (TY2023), with a further $25K in March 2025; it is invitation-only with no consecutive-year requests, so ask its staff when the next request is welcome and what it would fund</a:t>
                       </a:r>
                       <a:endParaRPr lang="en-US" sz="850" dirty="0">
                         <a:latin typeface="Arial" charset="0"/>
@@ -14028,6 +14038,17 @@
                       <a:pPr indent="0" marL="0">
                         <a:buNone/>
                       </a:pPr>
+                      <a:r>
+                        <a:rPr lang="en-US" sz="850" dirty="0">
+                          <a:solidFill>
+                            <a:srgbClr val="1F1B1D"/>
+                          </a:solidFill>
+                          <a:latin typeface="Arial" pitchFamily="34" charset="0"/>
+                          <a:ea typeface="Arial" pitchFamily="34" charset="-122"/>
+                          <a:cs typeface="Arial" pitchFamily="34" charset="-120"/>
+                        </a:rPr>
+                        <a:t>Invitation only</a:t>
+                      </a:r>
                       <a:endParaRPr lang="en-US" sz="850" dirty="0">
                         <a:latin typeface="Arial" charset="0"/>
                         <a:ea typeface="Arial" charset="0"/>
@@ -14223,7 +14244,7 @@
                           <a:ea typeface="Arial" pitchFamily="34" charset="-122"/>
                           <a:cs typeface="Arial" pitchFamily="34" charset="-120"/>
                         </a:rPr>
-                        <a:t>Upgrade ask: request a multi-year general-operating grant at the funder's peer-level amount, citing the FY25 deficit and the three-stream exposure</a:t>
+                        <a:t>Two conversations with GWCF: a successor to the Health Equity Fund support, and a core general-operating request</a:t>
                       </a:r>
                       <a:endParaRPr lang="en-US" sz="850" dirty="0">
                         <a:latin typeface="Arial" charset="0"/>
@@ -14418,389 +14439,8 @@
                           <a:ea typeface="Arial" pitchFamily="34" charset="-122"/>
                           <a:cs typeface="Arial" pitchFamily="34" charset="-120"/>
                         </a:rPr>
-                        <a:t>Cycle-specific; check Grant Opportunities page</a:t>
+                        <a:t>Open: by fund cycle</a:t>
                       </a:r>
-                      <a:endParaRPr lang="en-US" sz="850" dirty="0">
-                        <a:latin typeface="Arial" charset="0"/>
-                        <a:ea typeface="Arial" charset="0"/>
-                        <a:cs typeface="Arial" charset="0"/>
-                      </a:endParaRPr>
-                    </a:p>
-                  </a:txBody>
-                  <a:tcPr marL="32004" marR="32004" marT="32004" marB="32004">
-                    <a:lnL w="6350" cap="flat" cmpd="sng" algn="ctr">
-                      <a:solidFill>
-                        <a:srgbClr val="E6E2E4"/>
-                      </a:solidFill>
-                      <a:prstDash val="solid"/>
-                      <a:round/>
-                      <a:headEnd type="none" w="med" len="med"/>
-                      <a:tailEnd type="none" w="med" len="med"/>
-                    </a:lnL>
-                    <a:lnR w="6350" cap="flat" cmpd="sng" algn="ctr">
-                      <a:solidFill>
-                        <a:srgbClr val="E6E2E4"/>
-                      </a:solidFill>
-                      <a:prstDash val="solid"/>
-                      <a:round/>
-                      <a:headEnd type="none" w="med" len="med"/>
-                      <a:tailEnd type="none" w="med" len="med"/>
-                    </a:lnR>
-                    <a:lnT w="6350" cap="flat" cmpd="sng" algn="ctr">
-                      <a:solidFill>
-                        <a:srgbClr val="E6E2E4"/>
-                      </a:solidFill>
-                      <a:prstDash val="solid"/>
-                      <a:round/>
-                      <a:headEnd type="none" w="med" len="med"/>
-                      <a:tailEnd type="none" w="med" len="med"/>
-                    </a:lnT>
-                    <a:lnB w="6350" cap="flat" cmpd="sng" algn="ctr">
-                      <a:solidFill>
-                        <a:srgbClr val="E6E2E4"/>
-                      </a:solidFill>
-                      <a:prstDash val="solid"/>
-                      <a:round/>
-                      <a:headEnd type="none" w="med" len="med"/>
-                      <a:tailEnd type="none" w="med" len="med"/>
-                    </a:lnB>
-                  </a:tcPr>
-                </a:tc>
-              </a:tr>
-              <a:tr h="0">
-                <a:tc>
-                  <a:txBody>
-                    <a:bodyPr/>
-                    <a:lstStyle/>
-                    <a:p>
-                      <a:pPr indent="0" marL="0">
-                        <a:buNone/>
-                      </a:pPr>
-                      <a:r>
-                        <a:rPr lang="en-US" sz="850" dirty="0">
-                          <a:solidFill>
-                            <a:srgbClr val="1F1B1D"/>
-                          </a:solidFill>
-                          <a:latin typeface="Arial" pitchFamily="34" charset="0"/>
-                          <a:ea typeface="Arial" pitchFamily="34" charset="-122"/>
-                          <a:cs typeface="Arial" pitchFamily="34" charset="-120"/>
-                        </a:rPr>
-                        <a:t>Clark Charitable Foundation</a:t>
-                      </a:r>
-                      <a:endParaRPr lang="en-US" sz="850" dirty="0">
-                        <a:latin typeface="Arial" charset="0"/>
-                        <a:ea typeface="Arial" charset="0"/>
-                        <a:cs typeface="Arial" charset="0"/>
-                      </a:endParaRPr>
-                    </a:p>
-                  </a:txBody>
-                  <a:tcPr marL="32004" marR="32004" marT="32004" marB="32004">
-                    <a:lnL w="6350" cap="flat" cmpd="sng" algn="ctr">
-                      <a:solidFill>
-                        <a:srgbClr val="E6E2E4"/>
-                      </a:solidFill>
-                      <a:prstDash val="solid"/>
-                      <a:round/>
-                      <a:headEnd type="none" w="med" len="med"/>
-                      <a:tailEnd type="none" w="med" len="med"/>
-                    </a:lnL>
-                    <a:lnR w="6350" cap="flat" cmpd="sng" algn="ctr">
-                      <a:solidFill>
-                        <a:srgbClr val="E6E2E4"/>
-                      </a:solidFill>
-                      <a:prstDash val="solid"/>
-                      <a:round/>
-                      <a:headEnd type="none" w="med" len="med"/>
-                      <a:tailEnd type="none" w="med" len="med"/>
-                    </a:lnR>
-                    <a:lnT w="6350" cap="flat" cmpd="sng" algn="ctr">
-                      <a:solidFill>
-                        <a:srgbClr val="E6E2E4"/>
-                      </a:solidFill>
-                      <a:prstDash val="solid"/>
-                      <a:round/>
-                      <a:headEnd type="none" w="med" len="med"/>
-                      <a:tailEnd type="none" w="med" len="med"/>
-                    </a:lnT>
-                    <a:lnB w="6350" cap="flat" cmpd="sng" algn="ctr">
-                      <a:solidFill>
-                        <a:srgbClr val="E6E2E4"/>
-                      </a:solidFill>
-                      <a:prstDash val="solid"/>
-                      <a:round/>
-                      <a:headEnd type="none" w="med" len="med"/>
-                      <a:tailEnd type="none" w="med" len="med"/>
-                    </a:lnB>
-                  </a:tcPr>
-                </a:tc>
-                <a:tc>
-                  <a:txBody>
-                    <a:bodyPr/>
-                    <a:lstStyle/>
-                    <a:p>
-                      <a:pPr indent="0" marL="0">
-                        <a:buNone/>
-                      </a:pPr>
-                      <a:r>
-                        <a:rPr lang="en-US" sz="850" dirty="0">
-                          <a:solidFill>
-                            <a:srgbClr val="1F1B1D"/>
-                          </a:solidFill>
-                          <a:latin typeface="Arial" pitchFamily="34" charset="0"/>
-                          <a:ea typeface="Arial" pitchFamily="34" charset="-122"/>
-                          <a:cs typeface="Arial" pitchFamily="34" charset="-120"/>
-                        </a:rPr>
-                        <a:t>foundation</a:t>
-                      </a:r>
-                      <a:endParaRPr lang="en-US" sz="850" dirty="0">
-                        <a:latin typeface="Arial" charset="0"/>
-                        <a:ea typeface="Arial" charset="0"/>
-                        <a:cs typeface="Arial" charset="0"/>
-                      </a:endParaRPr>
-                    </a:p>
-                  </a:txBody>
-                  <a:tcPr marL="32004" marR="32004" marT="32004" marB="32004">
-                    <a:lnL w="6350" cap="flat" cmpd="sng" algn="ctr">
-                      <a:solidFill>
-                        <a:srgbClr val="E6E2E4"/>
-                      </a:solidFill>
-                      <a:prstDash val="solid"/>
-                      <a:round/>
-                      <a:headEnd type="none" w="med" len="med"/>
-                      <a:tailEnd type="none" w="med" len="med"/>
-                    </a:lnL>
-                    <a:lnR w="6350" cap="flat" cmpd="sng" algn="ctr">
-                      <a:solidFill>
-                        <a:srgbClr val="E6E2E4"/>
-                      </a:solidFill>
-                      <a:prstDash val="solid"/>
-                      <a:round/>
-                      <a:headEnd type="none" w="med" len="med"/>
-                      <a:tailEnd type="none" w="med" len="med"/>
-                    </a:lnR>
-                    <a:lnT w="6350" cap="flat" cmpd="sng" algn="ctr">
-                      <a:solidFill>
-                        <a:srgbClr val="E6E2E4"/>
-                      </a:solidFill>
-                      <a:prstDash val="solid"/>
-                      <a:round/>
-                      <a:headEnd type="none" w="med" len="med"/>
-                      <a:tailEnd type="none" w="med" len="med"/>
-                    </a:lnT>
-                    <a:lnB w="6350" cap="flat" cmpd="sng" algn="ctr">
-                      <a:solidFill>
-                        <a:srgbClr val="E6E2E4"/>
-                      </a:solidFill>
-                      <a:prstDash val="solid"/>
-                      <a:round/>
-                      <a:headEnd type="none" w="med" len="med"/>
-                      <a:tailEnd type="none" w="med" len="med"/>
-                    </a:lnB>
-                  </a:tcPr>
-                </a:tc>
-                <a:tc>
-                  <a:txBody>
-                    <a:bodyPr/>
-                    <a:lstStyle/>
-                    <a:p>
-                      <a:pPr indent="0" marL="0">
-                        <a:buNone/>
-                      </a:pPr>
-                      <a:r>
-                        <a:rPr lang="en-US" sz="850" dirty="0">
-                          <a:solidFill>
-                            <a:srgbClr val="1F1B1D"/>
-                          </a:solidFill>
-                          <a:latin typeface="Arial" pitchFamily="34" charset="0"/>
-                          <a:ea typeface="Arial" pitchFamily="34" charset="-122"/>
-                          <a:cs typeface="Arial" pitchFamily="34" charset="-120"/>
-                        </a:rPr>
-                        <a:t>Warm introduction through a shared peer or co-funder; request guidelines / invitation; submit an LOI in the next cycle</a:t>
-                      </a:r>
-                      <a:endParaRPr lang="en-US" sz="850" dirty="0">
-                        <a:latin typeface="Arial" charset="0"/>
-                        <a:ea typeface="Arial" charset="0"/>
-                        <a:cs typeface="Arial" charset="0"/>
-                      </a:endParaRPr>
-                    </a:p>
-                  </a:txBody>
-                  <a:tcPr marL="32004" marR="32004" marT="32004" marB="32004">
-                    <a:lnL w="6350" cap="flat" cmpd="sng" algn="ctr">
-                      <a:solidFill>
-                        <a:srgbClr val="E6E2E4"/>
-                      </a:solidFill>
-                      <a:prstDash val="solid"/>
-                      <a:round/>
-                      <a:headEnd type="none" w="med" len="med"/>
-                      <a:tailEnd type="none" w="med" len="med"/>
-                    </a:lnL>
-                    <a:lnR w="6350" cap="flat" cmpd="sng" algn="ctr">
-                      <a:solidFill>
-                        <a:srgbClr val="E6E2E4"/>
-                      </a:solidFill>
-                      <a:prstDash val="solid"/>
-                      <a:round/>
-                      <a:headEnd type="none" w="med" len="med"/>
-                      <a:tailEnd type="none" w="med" len="med"/>
-                    </a:lnR>
-                    <a:lnT w="6350" cap="flat" cmpd="sng" algn="ctr">
-                      <a:solidFill>
-                        <a:srgbClr val="E6E2E4"/>
-                      </a:solidFill>
-                      <a:prstDash val="solid"/>
-                      <a:round/>
-                      <a:headEnd type="none" w="med" len="med"/>
-                      <a:tailEnd type="none" w="med" len="med"/>
-                    </a:lnT>
-                    <a:lnB w="6350" cap="flat" cmpd="sng" algn="ctr">
-                      <a:solidFill>
-                        <a:srgbClr val="E6E2E4"/>
-                      </a:solidFill>
-                      <a:prstDash val="solid"/>
-                      <a:round/>
-                      <a:headEnd type="none" w="med" len="med"/>
-                      <a:tailEnd type="none" w="med" len="med"/>
-                    </a:lnB>
-                  </a:tcPr>
-                </a:tc>
-                <a:tc>
-                  <a:txBody>
-                    <a:bodyPr/>
-                    <a:lstStyle/>
-                    <a:p>
-                      <a:pPr indent="0" marL="0">
-                        <a:buNone/>
-                      </a:pPr>
-                      <a:r>
-                        <a:rPr lang="en-US" sz="850" dirty="0">
-                          <a:solidFill>
-                            <a:srgbClr val="1F1B1D"/>
-                          </a:solidFill>
-                          <a:latin typeface="Arial" pitchFamily="34" charset="0"/>
-                          <a:ea typeface="Arial" pitchFamily="34" charset="-122"/>
-                          <a:cs typeface="Arial" pitchFamily="34" charset="-120"/>
-                        </a:rPr>
-                        <a:t>CEO + board chair</a:t>
-                      </a:r>
-                      <a:endParaRPr lang="en-US" sz="850" dirty="0">
-                        <a:latin typeface="Arial" charset="0"/>
-                        <a:ea typeface="Arial" charset="0"/>
-                        <a:cs typeface="Arial" charset="0"/>
-                      </a:endParaRPr>
-                    </a:p>
-                  </a:txBody>
-                  <a:tcPr marL="32004" marR="32004" marT="32004" marB="32004">
-                    <a:lnL w="6350" cap="flat" cmpd="sng" algn="ctr">
-                      <a:solidFill>
-                        <a:srgbClr val="E6E2E4"/>
-                      </a:solidFill>
-                      <a:prstDash val="solid"/>
-                      <a:round/>
-                      <a:headEnd type="none" w="med" len="med"/>
-                      <a:tailEnd type="none" w="med" len="med"/>
-                    </a:lnL>
-                    <a:lnR w="6350" cap="flat" cmpd="sng" algn="ctr">
-                      <a:solidFill>
-                        <a:srgbClr val="E6E2E4"/>
-                      </a:solidFill>
-                      <a:prstDash val="solid"/>
-                      <a:round/>
-                      <a:headEnd type="none" w="med" len="med"/>
-                      <a:tailEnd type="none" w="med" len="med"/>
-                    </a:lnR>
-                    <a:lnT w="6350" cap="flat" cmpd="sng" algn="ctr">
-                      <a:solidFill>
-                        <a:srgbClr val="E6E2E4"/>
-                      </a:solidFill>
-                      <a:prstDash val="solid"/>
-                      <a:round/>
-                      <a:headEnd type="none" w="med" len="med"/>
-                      <a:tailEnd type="none" w="med" len="med"/>
-                    </a:lnT>
-                    <a:lnB w="6350" cap="flat" cmpd="sng" algn="ctr">
-                      <a:solidFill>
-                        <a:srgbClr val="E6E2E4"/>
-                      </a:solidFill>
-                      <a:prstDash val="solid"/>
-                      <a:round/>
-                      <a:headEnd type="none" w="med" len="med"/>
-                      <a:tailEnd type="none" w="med" len="med"/>
-                    </a:lnB>
-                  </a:tcPr>
-                </a:tc>
-                <a:tc>
-                  <a:txBody>
-                    <a:bodyPr/>
-                    <a:lstStyle/>
-                    <a:p>
-                      <a:pPr indent="0" marL="0">
-                        <a:buNone/>
-                      </a:pPr>
-                      <a:r>
-                        <a:rPr lang="en-US" sz="850" dirty="0">
-                          <a:solidFill>
-                            <a:srgbClr val="1F1B1D"/>
-                          </a:solidFill>
-                          <a:latin typeface="Arial" pitchFamily="34" charset="0"/>
-                          <a:ea typeface="Arial" pitchFamily="34" charset="-122"/>
-                          <a:cs typeface="Arial" pitchFamily="34" charset="-120"/>
-                        </a:rPr>
-                        <a:t>Day 60 (LOI by day 90)</a:t>
-                      </a:r>
-                      <a:endParaRPr lang="en-US" sz="850" dirty="0">
-                        <a:latin typeface="Arial" charset="0"/>
-                        <a:ea typeface="Arial" charset="0"/>
-                        <a:cs typeface="Arial" charset="0"/>
-                      </a:endParaRPr>
-                    </a:p>
-                  </a:txBody>
-                  <a:tcPr marL="32004" marR="32004" marT="32004" marB="32004">
-                    <a:lnL w="6350" cap="flat" cmpd="sng" algn="ctr">
-                      <a:solidFill>
-                        <a:srgbClr val="E6E2E4"/>
-                      </a:solidFill>
-                      <a:prstDash val="solid"/>
-                      <a:round/>
-                      <a:headEnd type="none" w="med" len="med"/>
-                      <a:tailEnd type="none" w="med" len="med"/>
-                    </a:lnL>
-                    <a:lnR w="6350" cap="flat" cmpd="sng" algn="ctr">
-                      <a:solidFill>
-                        <a:srgbClr val="E6E2E4"/>
-                      </a:solidFill>
-                      <a:prstDash val="solid"/>
-                      <a:round/>
-                      <a:headEnd type="none" w="med" len="med"/>
-                      <a:tailEnd type="none" w="med" len="med"/>
-                    </a:lnR>
-                    <a:lnT w="6350" cap="flat" cmpd="sng" algn="ctr">
-                      <a:solidFill>
-                        <a:srgbClr val="E6E2E4"/>
-                      </a:solidFill>
-                      <a:prstDash val="solid"/>
-                      <a:round/>
-                      <a:headEnd type="none" w="med" len="med"/>
-                      <a:tailEnd type="none" w="med" len="med"/>
-                    </a:lnT>
-                    <a:lnB w="6350" cap="flat" cmpd="sng" algn="ctr">
-                      <a:solidFill>
-                        <a:srgbClr val="E6E2E4"/>
-                      </a:solidFill>
-                      <a:prstDash val="solid"/>
-                      <a:round/>
-                      <a:headEnd type="none" w="med" len="med"/>
-                      <a:tailEnd type="none" w="med" len="med"/>
-                    </a:lnB>
-                  </a:tcPr>
-                </a:tc>
-                <a:tc>
-                  <a:txBody>
-                    <a:bodyPr/>
-                    <a:lstStyle/>
-                    <a:p>
-                      <a:pPr indent="0" marL="0">
-                        <a:buNone/>
-                      </a:pPr>
                       <a:endParaRPr lang="en-US" sz="850" dirty="0">
                         <a:latin typeface="Arial" charset="0"/>
                         <a:ea typeface="Arial" charset="0"/>
@@ -15182,6 +14822,17 @@
                       <a:pPr indent="0" marL="0">
                         <a:buNone/>
                       </a:pPr>
+                      <a:r>
+                        <a:rPr lang="en-US" sz="850" dirty="0">
+                          <a:solidFill>
+                            <a:srgbClr val="1F1B1D"/>
+                          </a:solidFill>
+                          <a:latin typeface="Arial" pitchFamily="34" charset="0"/>
+                          <a:ea typeface="Arial" pitchFamily="34" charset="-122"/>
+                          <a:cs typeface="Arial" pitchFamily="34" charset="-120"/>
+                        </a:rPr>
+                        <a:t>Existing award</a:t>
+                      </a:r>
                       <a:endParaRPr lang="en-US" sz="850" dirty="0">
                         <a:latin typeface="Arial" charset="0"/>
                         <a:ea typeface="Arial" charset="0"/>
@@ -15377,7 +15028,7 @@
                           <a:ea typeface="Arial" pitchFamily="34" charset="-122"/>
                           <a:cs typeface="Arial" pitchFamily="34" charset="-120"/>
                         </a:rPr>
-                        <a:t>Upgrade ask: request a multi-year general-operating grant at the funder's peer-level amount, citing the FY25 deficit and the three-stream exposure</a:t>
+                        <a:t>Upgrade ask: request a multi-year general-operating grant at the funder's peer-level amount, citing the FY25 deficit and the concentration in three public streams</a:t>
                       </a:r>
                       <a:endParaRPr lang="en-US" sz="850" dirty="0">
                         <a:latin typeface="Arial" charset="0"/>
@@ -15507,7 +15158,7 @@
                           <a:ea typeface="Arial" pitchFamily="34" charset="-122"/>
                           <a:cs typeface="Arial" pitchFamily="34" charset="-120"/>
                         </a:rPr>
-                        <a:t>Day 45</a:t>
+                        <a:t>Day 60</a:t>
                       </a:r>
                       <a:endParaRPr lang="en-US" sz="850" dirty="0">
                         <a:latin typeface="Arial" charset="0"/>
@@ -15572,7 +15223,7 @@
                           <a:ea typeface="Arial" pitchFamily="34" charset="-122"/>
                           <a:cs typeface="Arial" pitchFamily="34" charset="-120"/>
                         </a:rPr>
-                        <a:t>March 1, July 1, November 1</a:t>
+                        <a:t>Open: March 1, July 1, November 1</a:t>
                       </a:r>
                       <a:endParaRPr lang="en-US" sz="850" dirty="0">
                         <a:latin typeface="Arial" charset="0"/>
@@ -15955,6 +15606,17 @@
                       <a:pPr indent="0" marL="0">
                         <a:buNone/>
                       </a:pPr>
+                      <a:r>
+                        <a:rPr lang="en-US" sz="850" dirty="0">
+                          <a:solidFill>
+                            <a:srgbClr val="1F1B1D"/>
+                          </a:solidFill>
+                          <a:latin typeface="Arial" pitchFamily="34" charset="0"/>
+                          <a:ea typeface="Arial" pitchFamily="34" charset="-122"/>
+                          <a:cs typeface="Arial" pitchFamily="34" charset="-120"/>
+                        </a:rPr>
+                        <a:t>Existing award</a:t>
+                      </a:r>
                       <a:endParaRPr lang="en-US" sz="850" dirty="0">
                         <a:latin typeface="Arial" charset="0"/>
                         <a:ea typeface="Arial" charset="0"/>
@@ -16336,6 +15998,17 @@
                       <a:pPr indent="0" marL="0">
                         <a:buNone/>
                       </a:pPr>
+                      <a:r>
+                        <a:rPr lang="en-US" sz="850" dirty="0">
+                          <a:solidFill>
+                            <a:srgbClr val="1F1B1D"/>
+                          </a:solidFill>
+                          <a:latin typeface="Arial" pitchFamily="34" charset="0"/>
+                          <a:ea typeface="Arial" pitchFamily="34" charset="-122"/>
+                          <a:cs typeface="Arial" pitchFamily="34" charset="-120"/>
+                        </a:rPr>
+                        <a:t>Existing award</a:t>
+                      </a:r>
                       <a:endParaRPr lang="en-US" sz="850" dirty="0">
                         <a:latin typeface="Arial" charset="0"/>
                         <a:ea typeface="Arial" charset="0"/>
@@ -16531,7 +16204,7 @@
                           <a:ea typeface="Arial" pitchFamily="34" charset="-122"/>
                           <a:cs typeface="Arial" pitchFamily="34" charset="-120"/>
                         </a:rPr>
-                        <a:t>Upgrade ask: request a multi-year general-operating grant at the funder's peer-level amount, citing the FY25 deficit and the three-stream exposure</a:t>
+                        <a:t>Upgrade ask: request a multi-year general-operating grant at the funder's peer-level amount, citing the FY25 deficit and the concentration in three public streams</a:t>
                       </a:r>
                       <a:endParaRPr lang="en-US" sz="850" dirty="0">
                         <a:latin typeface="Arial" charset="0"/>
@@ -16661,7 +16334,7 @@
                           <a:ea typeface="Arial" pitchFamily="34" charset="-122"/>
                           <a:cs typeface="Arial" pitchFamily="34" charset="-120"/>
                         </a:rPr>
-                        <a:t>Day 45</a:t>
+                        <a:t>Day 60</a:t>
                       </a:r>
                       <a:endParaRPr lang="en-US" sz="850" dirty="0">
                         <a:latin typeface="Arial" charset="0"/>
@@ -16726,7 +16399,7 @@
                           <a:ea typeface="Arial" pitchFamily="34" charset="-122"/>
                           <a:cs typeface="Arial" pitchFamily="34" charset="-120"/>
                         </a:rPr>
-                        <a:t>Rolling</a:t>
+                        <a:t>Open: Rolling</a:t>
                       </a:r>
                       <a:endParaRPr lang="en-US" sz="850" dirty="0">
                         <a:latin typeface="Arial" charset="0"/>
@@ -17053,7 +16726,7 @@
                           <a:ea typeface="Arial" pitchFamily="34" charset="-122"/>
                           <a:cs typeface="Arial" pitchFamily="34" charset="-120"/>
                         </a:rPr>
-                        <a:t>Day 45</a:t>
+                        <a:t>Day 60</a:t>
                       </a:r>
                       <a:endParaRPr lang="en-US" sz="850" dirty="0">
                         <a:latin typeface="Arial" charset="0"/>
@@ -17109,6 +16782,17 @@
                       <a:pPr indent="0" marL="0">
                         <a:buNone/>
                       </a:pPr>
+                      <a:r>
+                        <a:rPr lang="en-US" sz="850" dirty="0">
+                          <a:solidFill>
+                            <a:srgbClr val="1F1B1D"/>
+                          </a:solidFill>
+                          <a:latin typeface="Arial" pitchFamily="34" charset="0"/>
+                          <a:ea typeface="Arial" pitchFamily="34" charset="-122"/>
+                          <a:cs typeface="Arial" pitchFamily="34" charset="-120"/>
+                        </a:rPr>
+                        <a:t>Existing partner</a:t>
+                      </a:r>
                       <a:endParaRPr lang="en-US" sz="850" dirty="0">
                         <a:latin typeface="Arial" charset="0"/>
                         <a:ea typeface="Arial" charset="0"/>
@@ -17304,7 +16988,7 @@
                           <a:ea typeface="Arial" pitchFamily="34" charset="-122"/>
                           <a:cs typeface="Arial" pitchFamily="34" charset="-120"/>
                         </a:rPr>
-                        <a:t>Warm introduction through a shared peer or co-funder; request guidelines / invitation; submit an LOI in the next cycle</a:t>
+                        <a:t>Secure an invitation through a named peer or co-funder (Schattner does not consider unsolicited requests); no LOI</a:t>
                       </a:r>
                       <a:endParaRPr lang="en-US" sz="850" dirty="0">
                         <a:latin typeface="Arial" charset="0"/>
@@ -17434,128 +17118,7 @@
                           <a:ea typeface="Arial" pitchFamily="34" charset="-122"/>
                           <a:cs typeface="Arial" pitchFamily="34" charset="-120"/>
                         </a:rPr>
-                        <a:t>Day 60 (LOI by day 90)</a:t>
-                      </a:r>
-                      <a:endParaRPr lang="en-US" sz="850" dirty="0">
-                        <a:latin typeface="Arial" charset="0"/>
-                        <a:ea typeface="Arial" charset="0"/>
-                        <a:cs typeface="Arial" charset="0"/>
-                      </a:endParaRPr>
-                    </a:p>
-                  </a:txBody>
-                  <a:tcPr marL="32004" marR="32004" marT="32004" marB="32004">
-                    <a:lnL w="6350" cap="flat" cmpd="sng" algn="ctr">
-                      <a:solidFill>
-                        <a:srgbClr val="E6E2E4"/>
-                      </a:solidFill>
-                      <a:prstDash val="solid"/>
-                      <a:round/>
-                      <a:headEnd type="none" w="med" len="med"/>
-                      <a:tailEnd type="none" w="med" len="med"/>
-                    </a:lnL>
-                    <a:lnR w="6350" cap="flat" cmpd="sng" algn="ctr">
-                      <a:solidFill>
-                        <a:srgbClr val="E6E2E4"/>
-                      </a:solidFill>
-                      <a:prstDash val="solid"/>
-                      <a:round/>
-                      <a:headEnd type="none" w="med" len="med"/>
-                      <a:tailEnd type="none" w="med" len="med"/>
-                    </a:lnR>
-                    <a:lnT w="6350" cap="flat" cmpd="sng" algn="ctr">
-                      <a:solidFill>
-                        <a:srgbClr val="E6E2E4"/>
-                      </a:solidFill>
-                      <a:prstDash val="solid"/>
-                      <a:round/>
-                      <a:headEnd type="none" w="med" len="med"/>
-                      <a:tailEnd type="none" w="med" len="med"/>
-                    </a:lnT>
-                    <a:lnB w="6350" cap="flat" cmpd="sng" algn="ctr">
-                      <a:solidFill>
-                        <a:srgbClr val="E6E2E4"/>
-                      </a:solidFill>
-                      <a:prstDash val="solid"/>
-                      <a:round/>
-                      <a:headEnd type="none" w="med" len="med"/>
-                      <a:tailEnd type="none" w="med" len="med"/>
-                    </a:lnB>
-                  </a:tcPr>
-                </a:tc>
-                <a:tc>
-                  <a:txBody>
-                    <a:bodyPr/>
-                    <a:lstStyle/>
-                    <a:p>
-                      <a:pPr indent="0" marL="0">
-                        <a:buNone/>
-                      </a:pPr>
-                      <a:endParaRPr lang="en-US" sz="850" dirty="0">
-                        <a:latin typeface="Arial" charset="0"/>
-                        <a:ea typeface="Arial" charset="0"/>
-                        <a:cs typeface="Arial" charset="0"/>
-                      </a:endParaRPr>
-                    </a:p>
-                  </a:txBody>
-                  <a:tcPr marL="32004" marR="32004" marT="32004" marB="32004">
-                    <a:lnL w="6350" cap="flat" cmpd="sng" algn="ctr">
-                      <a:solidFill>
-                        <a:srgbClr val="E6E2E4"/>
-                      </a:solidFill>
-                      <a:prstDash val="solid"/>
-                      <a:round/>
-                      <a:headEnd type="none" w="med" len="med"/>
-                      <a:tailEnd type="none" w="med" len="med"/>
-                    </a:lnL>
-                    <a:lnR w="6350" cap="flat" cmpd="sng" algn="ctr">
-                      <a:solidFill>
-                        <a:srgbClr val="E6E2E4"/>
-                      </a:solidFill>
-                      <a:prstDash val="solid"/>
-                      <a:round/>
-                      <a:headEnd type="none" w="med" len="med"/>
-                      <a:tailEnd type="none" w="med" len="med"/>
-                    </a:lnR>
-                    <a:lnT w="6350" cap="flat" cmpd="sng" algn="ctr">
-                      <a:solidFill>
-                        <a:srgbClr val="E6E2E4"/>
-                      </a:solidFill>
-                      <a:prstDash val="solid"/>
-                      <a:round/>
-                      <a:headEnd type="none" w="med" len="med"/>
-                      <a:tailEnd type="none" w="med" len="med"/>
-                    </a:lnT>
-                    <a:lnB w="6350" cap="flat" cmpd="sng" algn="ctr">
-                      <a:solidFill>
-                        <a:srgbClr val="E6E2E4"/>
-                      </a:solidFill>
-                      <a:prstDash val="solid"/>
-                      <a:round/>
-                      <a:headEnd type="none" w="med" len="med"/>
-                      <a:tailEnd type="none" w="med" len="med"/>
-                    </a:lnB>
-                  </a:tcPr>
-                </a:tc>
-              </a:tr>
-              <a:tr h="0">
-                <a:tc>
-                  <a:txBody>
-                    <a:bodyPr/>
-                    <a:lstStyle/>
-                    <a:p>
-                      <a:pPr indent="0" marL="0">
-                        <a:buNone/>
-                      </a:pPr>
-                      <a:r>
-                        <a:rPr lang="en-US" sz="850" dirty="0">
-                          <a:solidFill>
-                            <a:srgbClr val="1F1B1D"/>
-                          </a:solidFill>
-                          <a:latin typeface="Arial" pitchFamily="34" charset="0"/>
-                          <a:ea typeface="Arial" pitchFamily="34" charset="-122"/>
-                          <a:cs typeface="Arial" pitchFamily="34" charset="-120"/>
-                        </a:rPr>
-                        <a:t>Americas Charities</a:t>
+                        <a:t>Day 90 (introduction, then invitation)</a:t>
                       </a:r>
                       <a:endParaRPr lang="en-US" sz="850" dirty="0">
                         <a:latin typeface="Arial" charset="0"/>
@@ -17620,267 +17183,7 @@
                           <a:ea typeface="Arial" pitchFamily="34" charset="-122"/>
                           <a:cs typeface="Arial" pitchFamily="34" charset="-120"/>
                         </a:rPr>
-                        <a:t>foundation</a:t>
-                      </a:r>
-                      <a:endParaRPr lang="en-US" sz="850" dirty="0">
-                        <a:latin typeface="Arial" charset="0"/>
-                        <a:ea typeface="Arial" charset="0"/>
-                        <a:cs typeface="Arial" charset="0"/>
-                      </a:endParaRPr>
-                    </a:p>
-                  </a:txBody>
-                  <a:tcPr marL="32004" marR="32004" marT="32004" marB="32004">
-                    <a:lnL w="6350" cap="flat" cmpd="sng" algn="ctr">
-                      <a:solidFill>
-                        <a:srgbClr val="E6E2E4"/>
-                      </a:solidFill>
-                      <a:prstDash val="solid"/>
-                      <a:round/>
-                      <a:headEnd type="none" w="med" len="med"/>
-                      <a:tailEnd type="none" w="med" len="med"/>
-                    </a:lnL>
-                    <a:lnR w="6350" cap="flat" cmpd="sng" algn="ctr">
-                      <a:solidFill>
-                        <a:srgbClr val="E6E2E4"/>
-                      </a:solidFill>
-                      <a:prstDash val="solid"/>
-                      <a:round/>
-                      <a:headEnd type="none" w="med" len="med"/>
-                      <a:tailEnd type="none" w="med" len="med"/>
-                    </a:lnR>
-                    <a:lnT w="6350" cap="flat" cmpd="sng" algn="ctr">
-                      <a:solidFill>
-                        <a:srgbClr val="E6E2E4"/>
-                      </a:solidFill>
-                      <a:prstDash val="solid"/>
-                      <a:round/>
-                      <a:headEnd type="none" w="med" len="med"/>
-                      <a:tailEnd type="none" w="med" len="med"/>
-                    </a:lnT>
-                    <a:lnB w="6350" cap="flat" cmpd="sng" algn="ctr">
-                      <a:solidFill>
-                        <a:srgbClr val="E6E2E4"/>
-                      </a:solidFill>
-                      <a:prstDash val="solid"/>
-                      <a:round/>
-                      <a:headEnd type="none" w="med" len="med"/>
-                      <a:tailEnd type="none" w="med" len="med"/>
-                    </a:lnB>
-                  </a:tcPr>
-                </a:tc>
-                <a:tc>
-                  <a:txBody>
-                    <a:bodyPr/>
-                    <a:lstStyle/>
-                    <a:p>
-                      <a:pPr indent="0" marL="0">
-                        <a:buNone/>
-                      </a:pPr>
-                      <a:r>
-                        <a:rPr lang="en-US" sz="850" dirty="0">
-                          <a:solidFill>
-                            <a:srgbClr val="1F1B1D"/>
-                          </a:solidFill>
-                          <a:latin typeface="Arial" pitchFamily="34" charset="0"/>
-                          <a:ea typeface="Arial" pitchFamily="34" charset="-122"/>
-                          <a:cs typeface="Arial" pitchFamily="34" charset="-120"/>
-                        </a:rPr>
-                        <a:t>Warm introduction through a shared peer or co-funder; request guidelines / invitation; submit an LOI in the next cycle</a:t>
-                      </a:r>
-                      <a:endParaRPr lang="en-US" sz="850" dirty="0">
-                        <a:latin typeface="Arial" charset="0"/>
-                        <a:ea typeface="Arial" charset="0"/>
-                        <a:cs typeface="Arial" charset="0"/>
-                      </a:endParaRPr>
-                    </a:p>
-                  </a:txBody>
-                  <a:tcPr marL="32004" marR="32004" marT="32004" marB="32004">
-                    <a:lnL w="6350" cap="flat" cmpd="sng" algn="ctr">
-                      <a:solidFill>
-                        <a:srgbClr val="E6E2E4"/>
-                      </a:solidFill>
-                      <a:prstDash val="solid"/>
-                      <a:round/>
-                      <a:headEnd type="none" w="med" len="med"/>
-                      <a:tailEnd type="none" w="med" len="med"/>
-                    </a:lnL>
-                    <a:lnR w="6350" cap="flat" cmpd="sng" algn="ctr">
-                      <a:solidFill>
-                        <a:srgbClr val="E6E2E4"/>
-                      </a:solidFill>
-                      <a:prstDash val="solid"/>
-                      <a:round/>
-                      <a:headEnd type="none" w="med" len="med"/>
-                      <a:tailEnd type="none" w="med" len="med"/>
-                    </a:lnR>
-                    <a:lnT w="6350" cap="flat" cmpd="sng" algn="ctr">
-                      <a:solidFill>
-                        <a:srgbClr val="E6E2E4"/>
-                      </a:solidFill>
-                      <a:prstDash val="solid"/>
-                      <a:round/>
-                      <a:headEnd type="none" w="med" len="med"/>
-                      <a:tailEnd type="none" w="med" len="med"/>
-                    </a:lnT>
-                    <a:lnB w="6350" cap="flat" cmpd="sng" algn="ctr">
-                      <a:solidFill>
-                        <a:srgbClr val="E6E2E4"/>
-                      </a:solidFill>
-                      <a:prstDash val="solid"/>
-                      <a:round/>
-                      <a:headEnd type="none" w="med" len="med"/>
-                      <a:tailEnd type="none" w="med" len="med"/>
-                    </a:lnB>
-                  </a:tcPr>
-                </a:tc>
-                <a:tc>
-                  <a:txBody>
-                    <a:bodyPr/>
-                    <a:lstStyle/>
-                    <a:p>
-                      <a:pPr indent="0" marL="0">
-                        <a:buNone/>
-                      </a:pPr>
-                      <a:r>
-                        <a:rPr lang="en-US" sz="850" dirty="0">
-                          <a:solidFill>
-                            <a:srgbClr val="1F1B1D"/>
-                          </a:solidFill>
-                          <a:latin typeface="Arial" pitchFamily="34" charset="0"/>
-                          <a:ea typeface="Arial" pitchFamily="34" charset="-122"/>
-                          <a:cs typeface="Arial" pitchFamily="34" charset="-120"/>
-                        </a:rPr>
-                        <a:t>Development director</a:t>
-                      </a:r>
-                      <a:endParaRPr lang="en-US" sz="850" dirty="0">
-                        <a:latin typeface="Arial" charset="0"/>
-                        <a:ea typeface="Arial" charset="0"/>
-                        <a:cs typeface="Arial" charset="0"/>
-                      </a:endParaRPr>
-                    </a:p>
-                  </a:txBody>
-                  <a:tcPr marL="32004" marR="32004" marT="32004" marB="32004">
-                    <a:lnL w="6350" cap="flat" cmpd="sng" algn="ctr">
-                      <a:solidFill>
-                        <a:srgbClr val="E6E2E4"/>
-                      </a:solidFill>
-                      <a:prstDash val="solid"/>
-                      <a:round/>
-                      <a:headEnd type="none" w="med" len="med"/>
-                      <a:tailEnd type="none" w="med" len="med"/>
-                    </a:lnL>
-                    <a:lnR w="6350" cap="flat" cmpd="sng" algn="ctr">
-                      <a:solidFill>
-                        <a:srgbClr val="E6E2E4"/>
-                      </a:solidFill>
-                      <a:prstDash val="solid"/>
-                      <a:round/>
-                      <a:headEnd type="none" w="med" len="med"/>
-                      <a:tailEnd type="none" w="med" len="med"/>
-                    </a:lnR>
-                    <a:lnT w="6350" cap="flat" cmpd="sng" algn="ctr">
-                      <a:solidFill>
-                        <a:srgbClr val="E6E2E4"/>
-                      </a:solidFill>
-                      <a:prstDash val="solid"/>
-                      <a:round/>
-                      <a:headEnd type="none" w="med" len="med"/>
-                      <a:tailEnd type="none" w="med" len="med"/>
-                    </a:lnT>
-                    <a:lnB w="6350" cap="flat" cmpd="sng" algn="ctr">
-                      <a:solidFill>
-                        <a:srgbClr val="E6E2E4"/>
-                      </a:solidFill>
-                      <a:prstDash val="solid"/>
-                      <a:round/>
-                      <a:headEnd type="none" w="med" len="med"/>
-                      <a:tailEnd type="none" w="med" len="med"/>
-                    </a:lnB>
-                  </a:tcPr>
-                </a:tc>
-                <a:tc>
-                  <a:txBody>
-                    <a:bodyPr/>
-                    <a:lstStyle/>
-                    <a:p>
-                      <a:pPr indent="0" marL="0">
-                        <a:buNone/>
-                      </a:pPr>
-                      <a:r>
-                        <a:rPr lang="en-US" sz="850" dirty="0">
-                          <a:solidFill>
-                            <a:srgbClr val="1F1B1D"/>
-                          </a:solidFill>
-                          <a:latin typeface="Arial" pitchFamily="34" charset="0"/>
-                          <a:ea typeface="Arial" pitchFamily="34" charset="-122"/>
-                          <a:cs typeface="Arial" pitchFamily="34" charset="-120"/>
-                        </a:rPr>
-                        <a:t>Day 60 (LOI by day 90)</a:t>
-                      </a:r>
-                      <a:endParaRPr lang="en-US" sz="850" dirty="0">
-                        <a:latin typeface="Arial" charset="0"/>
-                        <a:ea typeface="Arial" charset="0"/>
-                        <a:cs typeface="Arial" charset="0"/>
-                      </a:endParaRPr>
-                    </a:p>
-                  </a:txBody>
-                  <a:tcPr marL="32004" marR="32004" marT="32004" marB="32004">
-                    <a:lnL w="6350" cap="flat" cmpd="sng" algn="ctr">
-                      <a:solidFill>
-                        <a:srgbClr val="E6E2E4"/>
-                      </a:solidFill>
-                      <a:prstDash val="solid"/>
-                      <a:round/>
-                      <a:headEnd type="none" w="med" len="med"/>
-                      <a:tailEnd type="none" w="med" len="med"/>
-                    </a:lnL>
-                    <a:lnR w="6350" cap="flat" cmpd="sng" algn="ctr">
-                      <a:solidFill>
-                        <a:srgbClr val="E6E2E4"/>
-                      </a:solidFill>
-                      <a:prstDash val="solid"/>
-                      <a:round/>
-                      <a:headEnd type="none" w="med" len="med"/>
-                      <a:tailEnd type="none" w="med" len="med"/>
-                    </a:lnR>
-                    <a:lnT w="6350" cap="flat" cmpd="sng" algn="ctr">
-                      <a:solidFill>
-                        <a:srgbClr val="E6E2E4"/>
-                      </a:solidFill>
-                      <a:prstDash val="solid"/>
-                      <a:round/>
-                      <a:headEnd type="none" w="med" len="med"/>
-                      <a:tailEnd type="none" w="med" len="med"/>
-                    </a:lnT>
-                    <a:lnB w="6350" cap="flat" cmpd="sng" algn="ctr">
-                      <a:solidFill>
-                        <a:srgbClr val="E6E2E4"/>
-                      </a:solidFill>
-                      <a:prstDash val="solid"/>
-                      <a:round/>
-                      <a:headEnd type="none" w="med" len="med"/>
-                      <a:tailEnd type="none" w="med" len="med"/>
-                    </a:lnB>
-                  </a:tcPr>
-                </a:tc>
-                <a:tc>
-                  <a:txBody>
-                    <a:bodyPr/>
-                    <a:lstStyle/>
-                    <a:p>
-                      <a:pPr indent="0" marL="0">
-                        <a:buNone/>
-                      </a:pPr>
-                      <a:r>
-                        <a:rPr lang="en-US" sz="850" dirty="0">
-                          <a:solidFill>
-                            <a:srgbClr val="1F1B1D"/>
-                          </a:solidFill>
-                          <a:latin typeface="Arial" pitchFamily="34" charset="0"/>
-                          <a:ea typeface="Arial" pitchFamily="34" charset="-122"/>
-                          <a:cs typeface="Arial" pitchFamily="34" charset="-120"/>
-                        </a:rPr>
-                        <a:t>Annual campaign enrollment</a:t>
+                        <a:t>Invitation only</a:t>
                       </a:r>
                       <a:endParaRPr lang="en-US" sz="850" dirty="0">
                         <a:latin typeface="Arial" charset="0"/>
@@ -18024,7 +17327,7 @@
                   <a:srgbClr val="8C8488"/>
                 </a:solidFill>
               </a:rPr>
-              <a:t>Method: seven weighted dimensions in config/scoring_weights.yaml; Tier 1 = score ≥ 0.62 and typical grant ≥ $25K; public rows carry analyst scores</a:t>
+              <a:t>Method: seven weighted dimensions in config/scoring_weights.yaml; Tier 1 = score ≥ 0.62 and typical grant ≥ $25K; closed funders and channels excluded; open status from funders' own pages, Oct 2026</a:t>
             </a:r>
             <a:endParaRPr lang="en-US" sz="850" dirty="0"/>
           </a:p>
@@ -18262,7 +17565,7 @@
                   <a:srgbClr val="41242F"/>
                 </a:solidFill>
               </a:rPr>
-              <a:t>Workforce (near): a SheWorks-style cohort inside Step Up DC; opens DOES and workforce funders.</a:t>
+              <a:t>Workforce (near): a SheWorks-style cohort inside Step Up DC; the first cost is the second workforce position, unfunded in FY2026.</a:t>
             </a:r>
             <a:endParaRPr lang="en-US" sz="1100" dirty="0"/>
           </a:p>
@@ -18782,14 +18085,14 @@
               <a:buNone/>
             </a:pPr>
             <a:r>
-              <a:rPr lang="en-US" sz="1300" b="1" dirty="0">
+              <a:rPr lang="en-US" sz="1250" b="1" dirty="0">
                 <a:solidFill>
                   <a:srgbClr val="41242F"/>
                 </a:solidFill>
               </a:rPr>
               <a:t>March–July is the season: proposal, markups, vote.</a:t>
             </a:r>
-            <a:endParaRPr lang="en-US" sz="1300" dirty="0"/>
+            <a:endParaRPr lang="en-US" sz="1250" dirty="0"/>
           </a:p>
           <a:p>
             <a:pPr marL="228600" indent="-228600">
@@ -18800,14 +18103,14 @@
               <a:buChar char="•"/>
             </a:pPr>
             <a:r>
-              <a:rPr lang="en-US" sz="1300" dirty="0">
+              <a:rPr lang="en-US" sz="1250" dirty="0">
                 <a:solidFill>
                   <a:srgbClr val="1F1B1D"/>
                 </a:solidFill>
               </a:rPr>
               <a:t>Mayor's budget March–April (cuts proposed in FY26 and FY27); committee markups May–June; Council vote June–July (restorations).</a:t>
             </a:r>
-            <a:endParaRPr lang="en-US" sz="1300" dirty="0"/>
+            <a:endParaRPr lang="en-US" sz="1250" dirty="0"/>
           </a:p>
           <a:p>
             <a:pPr marL="228600" indent="-228600">
@@ -18818,14 +18121,14 @@
               <a:buChar char="•"/>
             </a:pPr>
             <a:r>
-              <a:rPr lang="en-US" sz="1300" dirty="0">
+              <a:rPr lang="en-US" sz="1250" dirty="0">
                 <a:solidFill>
                   <a:srgbClr val="1F1B1D"/>
                 </a:solidFill>
               </a:rPr>
               <a:t>Join the coalition testimony that restored the victim-services line twice.</a:t>
             </a:r>
-            <a:endParaRPr lang="en-US" sz="1300" dirty="0"/>
+            <a:endParaRPr lang="en-US" sz="1250" dirty="0"/>
           </a:p>
           <a:p>
             <a:pPr marL="228600" indent="-228600">
@@ -18836,14 +18139,32 @@
               <a:buChar char="•"/>
             </a:pPr>
             <a:r>
-              <a:rPr lang="en-US" sz="1300" dirty="0">
+              <a:rPr lang="en-US" sz="1250" dirty="0">
                 <a:solidFill>
                   <a:srgbClr val="1F1B1D"/>
                 </a:solidFill>
               </a:rPr>
-              <a:t>Track draw-down against ceilings monthly; watch OVSJG under-spend, TCP's DHS purchase orders, the CoC NOFO and the EHV sunset.</a:t>
-            </a:r>
-            <a:endParaRPr lang="en-US" sz="1300" dirty="0"/>
+              <a:t>Track draw-down monthly; watch TCP's DHS purchase orders, FY2026 CoC awards (about December 2026) and the EHV end on 31 December 2026.</a:t>
+            </a:r>
+            <a:endParaRPr lang="en-US" sz="1250" dirty="0"/>
+          </a:p>
+          <a:p>
+            <a:pPr marL="228600" indent="-228600">
+              <a:spcAft>
+                <a:spcPts val="400"/>
+              </a:spcAft>
+              <a:buSzPct val="100000"/>
+              <a:buChar char="•"/>
+            </a:pPr>
+            <a:r>
+              <a:rPr lang="en-US" sz="1250" dirty="0">
+                <a:solidFill>
+                  <a:srgbClr val="1F1B1D"/>
+                </a:solidFill>
+              </a:rPr>
+              <a:t>The FY27 OVSJG restoration is mostly one-time, so FY2028 is the next test.</a:t>
+            </a:r>
+            <a:endParaRPr lang="en-US" sz="1250" dirty="0"/>
           </a:p>
         </p:txBody>
       </p:sp>
@@ -18924,7 +18245,7 @@
                   <a:srgbClr val="8C8488"/>
                 </a:solidFill>
               </a:rPr>
-              <a:t>Source: fact_org_financials (months of cash, 20 organizations), fact_policy_events (DC budget calendar FY2024–FY2027)</a:t>
+              <a:t>Source: fact_org_financials (months of cash, 21 organizations; FY25 expenses), fact_policy_events (DC budget calendar FY2024–FY2027)</a:t>
             </a:r>
             <a:endParaRPr lang="en-US" sz="850" dirty="0"/>
           </a:p>
@@ -18938,7 +18259,7 @@
                   <a:srgbClr val="8C8488"/>
                 </a:solidFill>
               </a:rPr>
-              <a:t>Method: months of cash = cash and savings ÷ monthly expenses, FY2024</a:t>
+              <a:t>Method: months of cash = cash and savings ÷ monthly expenses, FY2024; six-month reserve = FY25 expenses ÷ 2</a:t>
             </a:r>
             <a:endParaRPr lang="en-US" sz="850" dirty="0"/>
           </a:p>
@@ -18952,7 +18273,7 @@
                   <a:srgbClr val="8C8488"/>
                 </a:solidFill>
               </a:rPr>
-              <a:t>Chart m3_04, m2_06 · data as of 2026-10-10 · method note A6, B1</a:t>
+              <a:t>Chart m3_00, m2_07 (parameters), m2_06 · data as of 2026-10-10 · method note A6, B1</a:t>
             </a:r>
             <a:endParaRPr lang="en-US" sz="850" dirty="0"/>
           </a:p>
@@ -19474,7 +18795,7 @@
                   <a:srgbClr val="41242F"/>
                 </a:solidFill>
               </a:rPr>
-              <a:t>The FY24–25 audits, the TCP agreements and the FY25 gala calendar would sharpen every number in this deck.</a:t>
+              <a:t>The FY24–25 audits, the TCP agreements and Calvary's donor-record notes would sharpen every number in this deck.</a:t>
             </a:r>
             <a:endParaRPr lang="en-US" sz="2100" dirty="0"/>
           </a:p>
@@ -19754,7 +19075,7 @@
       </p:sp>
       <p:sp>
         <p:nvSpPr>
-          <p:cNvPr id="9" name="card FY25 event calendar and CRM notes"/>
+          <p:cNvPr id="9" name="card Donor-record (CRM) notes"/>
           <p:cNvSpPr/>
           <p:nvPr/>
         </p:nvSpPr>
@@ -19807,7 +19128,7 @@
                   <a:srgbClr val="41242F"/>
                 </a:solidFill>
               </a:rPr>
-              <a:t>FY25 event calendar and CRM notes</a:t>
+              <a:t>Donor-record (CRM) notes</a:t>
             </a:r>
             <a:endParaRPr lang="en-US" sz="1400" dirty="0"/>
           </a:p>
@@ -19846,7 +19167,7 @@
                   <a:srgbClr val="41242F"/>
                 </a:solidFill>
               </a:rPr>
-              <a:t>Resolves whether the gala moved across the fiscal year.</a:t>
+              <a:t>Resolves cash vs in-kind in the corporate relationships (MGAC, Capital One, IMF).</a:t>
             </a:r>
             <a:endParaRPr lang="en-US" sz="1300" dirty="0"/>
           </a:p>
@@ -19864,7 +19185,7 @@
                   <a:srgbClr val="1F1B1D"/>
                 </a:solidFill>
               </a:rPr>
-              <a:t>Cash vs in-kind in the corporate relationships (MGAC, Capital One, IMF)</a:t>
+              <a:t>Lapsed funders' gifts routed through DAFs</a:t>
             </a:r>
             <a:endParaRPr lang="en-US" sz="1300" dirty="0"/>
           </a:p>
@@ -19882,7 +19203,7 @@
                   <a:srgbClr val="1F1B1D"/>
                 </a:solidFill>
               </a:rPr>
-              <a:t>Lapsed funders' gifts routed through DAFs</a:t>
+              <a:t>Which recent gifts came from foundations rather than firms</a:t>
             </a:r>
             <a:endParaRPr lang="en-US" sz="1300" dirty="0"/>
           </a:p>
@@ -19965,7 +19286,7 @@
                   <a:srgbClr val="8C8488"/>
                 </a:solidFill>
               </a:rPr>
-              <a:t>Source: discoveries_log.md (flags D1–D3) and open_questions.md part B from the data build</a:t>
+              <a:t>Source: discoveries_log.md (flags D1–D2; D3 resolved from the 990) and open_questions.md part B from the data build</a:t>
             </a:r>
             <a:endParaRPr lang="en-US" sz="850" dirty="0"/>
           </a:p>
@@ -19993,7 +19314,7 @@
                   <a:srgbClr val="8C8488"/>
                 </a:solidFill>
               </a:rPr>
-              <a:t>Chart m2_02, m2_03, m1_06 · data as of 2026-10-10</a:t>
+              <a:t>Chart m2_02, m2_03, m5_06 · data as of 2026-10-10</a:t>
             </a:r>
             <a:endParaRPr lang="en-US" sz="850" dirty="0"/>
           </a:p>
@@ -20494,7 +19815,7 @@
                   <a:srgbClr val="1F1B1D"/>
                 </a:solidFill>
               </a:rPr>
-              <a:t>Adopt (or adjust) the verdict framing and the $3M / 50% target</a:t>
+              <a:t>Adopt (or adjust) the verdict framing and the $3M private-revenue target</a:t>
             </a:r>
             <a:endParaRPr lang="en-US" sz="1300" dirty="0"/>
           </a:p>
@@ -20512,7 +19833,7 @@
                   <a:srgbClr val="1F1B1D"/>
                 </a:solidFill>
               </a:rPr>
-              <a:t>Confirm the Tier 1 list and owners</a:t>
+              <a:t>Confirm the Tier 1 list, the peer set and owners</a:t>
             </a:r>
             <a:endParaRPr lang="en-US" sz="1300" dirty="0"/>
           </a:p>
@@ -20807,7 +20128,7 @@
                   <a:srgbClr val="1F1B1D"/>
                 </a:solidFill>
               </a:rPr>
-              <a:t>Consulting deck: 55 slides with every module, method and the complete scored pipeline.</a:t>
+              <a:t>Consulting deck: 66 slides with every module, method and the complete scored pipeline.</a:t>
             </a:r>
             <a:endParaRPr lang="en-US" sz="1550" dirty="0"/>
           </a:p>
@@ -21059,7 +20380,7 @@
       </p:sp>
       <p:sp>
         <p:nvSpPr>
-          <p:cNvPr id="3" name="tile Real revenue growth FY19 → FY25 ($2.49M → $4.97M, 2024 dollars)"/>
+          <p:cNvPr id="3" name="tile Revenue growth after inflation FY19 → FY25 ($2.49M → $4.97M nominal; $3.05M → $4.84M in 2024 dollars)"/>
           <p:cNvSpPr/>
           <p:nvPr/>
         </p:nvSpPr>
@@ -21150,7 +20471,7 @@
                   <a:srgbClr val="5C5458"/>
                 </a:solidFill>
               </a:rPr>
-              <a:t>Real revenue growth FY19 → FY25 ($2.49M → $4.97M, 2024 dollars)</a:t>
+              <a:t>Revenue growth after inflation FY19 → FY25 ($2.49M → $4.97M nominal; $3.05M → $4.84M in 2024 dollars)</a:t>
             </a:r>
             <a:endParaRPr lang="en-US" sz="1150" dirty="0"/>
           </a:p>
@@ -21158,7 +20479,7 @@
       </p:sp>
       <p:sp>
         <p:nvSpPr>
-          <p:cNvPr id="6" name="tile Housing inventory 2025, up from 68 in 2022; 6.8% of DC's transitional-housing beds (2.5% in 2022)"/>
+          <p:cNvPr id="6" name="tile Transitional, permanent supportive and rapid-rehousing beds in 2025, up from 68 in 2022; its 94 transitional beds are 6.8% of DC's (2.5% in 2022)"/>
           <p:cNvSpPr/>
           <p:nvPr/>
         </p:nvSpPr>
@@ -21249,7 +20570,7 @@
                   <a:srgbClr val="5C5458"/>
                 </a:solidFill>
               </a:rPr>
-              <a:t>Housing inventory 2025, up from 68 in 2022; 6.8% of DC's transitional-housing beds (2.5% in 2022)</a:t>
+              <a:t>Transitional, permanent supportive and rapid-rehousing beds in 2025, up from 68 in 2022; its 94 transitional beds are 6.8% of DC's (2.5% in 2022)</a:t>
             </a:r>
             <a:endParaRPr lang="en-US" sz="1150" dirty="0"/>
           </a:p>
@@ -21854,7 +21175,7 @@
                   <a:srgbClr val="1F1B1D"/>
                 </a:solidFill>
               </a:rPr>
-              <a:t>11th of 19 DC-area organizations; 57th percentile of DC's human-services sector.</a:t>
+              <a:t>11th of 19 DC-area organizations; 57th percentile among DC human-services organizations that report government revenue.</a:t>
             </a:r>
             <a:endParaRPr lang="en-US" sz="1150" dirty="0"/>
           </a:p>
@@ -21986,7 +21307,7 @@
                   <a:srgbClr val="8C8488"/>
                 </a:solidFill>
               </a:rPr>
-              <a:t>Method: government share = audited government contracts and grants ÷ audited revenue; 990 line 1e ÷ 990 revenue for FY24–25</a:t>
+              <a:t>Method: government share = audited government contracts and grants ÷ audited revenue; 990 line 1e ÷ 990 revenue for FY24–25; FY25 gala receipts sit in other revenue (line 8a, net)</a:t>
             </a:r>
             <a:endParaRPr lang="en-US" sz="850" dirty="0"/>
           </a:p>
@@ -22000,7 +21321,7 @@
                   <a:srgbClr val="8C8488"/>
                 </a:solidFill>
               </a:rPr>
-              <a:t>Chart m1_02 · data as of 2026-10-10 · method note A1</a:t>
+              <a:t>Chart m1_02, m3_07 · data as of 2026-10-10 · method note A1</a:t>
             </a:r>
             <a:endParaRPr lang="en-US" sz="850" dirty="0"/>
           </a:p>
@@ -22224,7 +21545,7 @@
                   <a:srgbClr val="41242F"/>
                 </a:solidFill>
               </a:rPr>
-              <a:t>TCP carries 74% of the base.</a:t>
+              <a:t>TCP carries 78% of the 2024 base.</a:t>
             </a:r>
             <a:endParaRPr lang="en-US" sz="1150" dirty="0"/>
           </a:p>
@@ -22701,7 +22022,7 @@
                   <a:srgbClr val="1F1B1D"/>
                 </a:solidFill>
               </a:rPr>
-              <a:t>Donor-advised sponsors (Benevity, Fidelity, Schwab) add $1.1M over five years: individual donors' money.</a:t>
+              <a:t>Donor-advised sponsors add $1.1M over five years ($0.95M from Benevity, Fidelity and Schwab): individual donors' money.</a:t>
             </a:r>
             <a:endParaRPr lang="en-US" sz="1150" dirty="0"/>
           </a:p>
@@ -22920,7 +22241,7 @@
                   <a:srgbClr val="41242F"/>
                 </a:solidFill>
               </a:rPr>
-              <a:t>After a strong FY24, FY25 brought a $607K deficit, a $483K event-income drop, and 4.4 months of cash.</a:t>
+              <a:t>After a strong FY24, FY25 brought a $607K deficit and 4.4 months of cash, while event receipts held near $0.5M.</a:t>
             </a:r>
             <a:endParaRPr lang="en-US" sz="2100" dirty="0"/>
           </a:p>
@@ -23027,7 +22348,7 @@
       </p:sp>
       <p:sp>
         <p:nvSpPr>
-          <p:cNvPr id="6" name="tile Event contributions FY24 → FY25 (990 line 1c); net event income turned positive, so timing may explain part of it"/>
+          <p:cNvPr id="6" name="tile Event receipts FY24 → FY25 (990 lines 1c + 8a); the FY25 return reported the gala on line 8a, not as contributions"/>
           <p:cNvSpPr/>
           <p:nvPr/>
         </p:nvSpPr>
@@ -23082,7 +22403,7 @@
                   <a:srgbClr val="41242F"/>
                 </a:solidFill>
               </a:rPr>
-              <a:t>$538K → $55K</a:t>
+              <a:t>$596K → $533K</a:t>
             </a:r>
             <a:endParaRPr lang="en-US" sz="2800" dirty="0"/>
           </a:p>
@@ -23118,7 +22439,7 @@
                   <a:srgbClr val="5C5458"/>
                 </a:solidFill>
               </a:rPr>
-              <a:t>Event contributions FY24 → FY25 (990 line 1c); net event income turned positive, so timing may explain part of it</a:t>
+              <a:t>Event receipts FY24 → FY25 (990 lines 1c + 8a); the FY25 return reported the gala on line 8a, not as contributions</a:t>
             </a:r>
             <a:endParaRPr lang="en-US" sz="1150" dirty="0"/>
           </a:p>
@@ -23253,7 +22574,7 @@
                   <a:srgbClr val="1F1B1D"/>
                 </a:solidFill>
               </a:rPr>
-              <a:t>These are clouds on the horizon rather than a verdict on the year: FY24 was unusually strong and the event line may be a calendar change. They do mean there is little room to absorb a public-funding shock.</a:t>
+              <a:t>These are clouds on the horizon rather than a verdict on the year: FY24 was unusually strong, and the gala held steady (the 2025 gala fell inside FY25 and the 2026 gala raised over $620K). They do mean there is little room to absorb a public-funding shock.</a:t>
             </a:r>
             <a:endParaRPr lang="en-US" sz="1500" dirty="0"/>
           </a:p>
@@ -23336,7 +22657,7 @@
                   <a:srgbClr val="8C8488"/>
                 </a:solidFill>
               </a:rPr>
-              <a:t>Source: IRS 990 returns FY2021–FY2025, fact_org_financials</a:t>
+              <a:t>Source: IRS 990 returns FY2021–FY2025, fact_org_financials; Calvary gala announcements (2025, 2026)</a:t>
             </a:r>
             <a:endParaRPr lang="en-US" sz="850" dirty="0"/>
           </a:p>
@@ -23350,7 +22671,7 @@
                   <a:srgbClr val="8C8488"/>
                 </a:solidFill>
               </a:rPr>
-              <a:t>Method: months of cash = cash_savings_eoy ÷ (total_expenses ÷ 12)</a:t>
+              <a:t>Method: months of cash = cash_savings_eoy ÷ (total_expenses ÷ 12); event receipts = line 1c event contributions + line 8a gross fundraising-event income</a:t>
             </a:r>
             <a:endParaRPr lang="en-US" sz="850" dirty="0"/>
           </a:p>
@@ -23733,7 +23054,7 @@
                   <a:srgbClr val="1F1B1D"/>
                 </a:solidFill>
               </a:rPr>
-              <a:t>Mayor proposed −$5.8M (FY26) and −$5.6M (FY27); the Council restored both.</a:t>
+              <a:t>Mayor proposed −$5.8M (FY26) and −$5.6M (FY27); the Council restored both, though the FY27 restoration is mostly one-time ($5.1M of $5.6M).</a:t>
             </a:r>
             <a:endParaRPr lang="en-US" sz="1100" dirty="0"/>
           </a:p>
@@ -23939,7 +23260,7 @@
 </file>
 
 <file path=ppt/theme/theme1.xml><?xml version="1.0" encoding="utf-8"?>
-<a:theme xmlns:a="http://schemas.openxmlformats.org/drawingml/2006/main" name="Calvary Funding Engagement">
+<a:theme xmlns:a="http://schemas.openxmlformats.org/drawingml/2006/main" name="Office Theme">
   <a:themeElements>
     <a:clrScheme name="Calvary Funding Engagement">
       <a:dk1>
@@ -23979,7 +23300,7 @@
         <a:srgbClr val="8C8488"/>
       </a:folHlink>
     </a:clrScheme>
-    <a:fontScheme name="Calvary Funding Engagement">
+    <a:fontScheme name="Office">
       <a:majorFont>
         <a:latin typeface="Arial"/>
         <a:ea typeface=""/>
